--- a/clase1_emprender_conscientemente/Clase_1_Emprender_Conscientemente_MODOLIDER.pptx
+++ b/clase1_emprender_conscientemente/Clase_1_Emprender_Conscientemente_MODOLIDER.pptx
@@ -15,6 +15,10 @@
     <p:sldId id="263" r:id="rId14"/>
     <p:sldId id="264" r:id="rId15"/>
     <p:sldId id="265" r:id="rId16"/>
+    <p:sldId id="266" r:id="rId17"/>
+    <p:sldId id="267" r:id="rId18"/>
+    <p:sldId id="268" r:id="rId19"/>
+    <p:sldId id="269" r:id="rId20"/>
   </p:sldIdLst>
   <p:sldSz cx="12191695" cy="6858000" type="screen4x3"/>
   <p:notesSz cx="6858000" cy="9144000"/>
@@ -3191,7 +3195,7 @@
         </p:nvSpPr>
         <p:spPr>
           <a:xfrm>
-            <a:off x="1097280" y="1920240"/>
+            <a:off x="1097280" y="1828800"/>
             <a:ext cx="10058400" cy="457200"/>
           </a:xfrm>
           <a:prstGeom prst="rect">
@@ -3227,8 +3231,8 @@
         </p:nvSpPr>
         <p:spPr>
           <a:xfrm>
-            <a:off x="1097280" y="2377440"/>
-            <a:ext cx="10058400" cy="1645920"/>
+            <a:off x="1097280" y="2286000"/>
+            <a:ext cx="10058400" cy="1828800"/>
           </a:xfrm>
           <a:prstGeom prst="rect">
             <a:avLst/>
@@ -3242,7 +3246,7 @@
           <a:lstStyle/>
           <a:p>
             <a:pPr>
-              <a:defRPr sz="3600" b="1">
+              <a:defRPr sz="3200" b="1">
                 <a:solidFill>
                   <a:srgbClr val="F5F5F7"/>
                 </a:solidFill>
@@ -3250,11 +3254,11 @@
               </a:defRPr>
             </a:pPr>
             <a:r>
-              <a:t>CAPITULO 1</a:t>
+              <a:t>CLASE 1: EL EMPRESARIO CONSCIENTE</a:t>
             </a:r>
             <a:br/>
             <a:r>
-              <a:t>EMPRENDER CONSCIENTEMENTE</a:t>
+              <a:t>GESTIONAR DESDE LA CLARIDAD</a:t>
             </a:r>
           </a:p>
         </p:txBody>
@@ -3267,7 +3271,7 @@
         </p:nvSpPr>
         <p:spPr>
           <a:xfrm>
-            <a:off x="1097280" y="4114800"/>
+            <a:off x="1097280" y="4297680"/>
             <a:ext cx="10058400" cy="731520"/>
           </a:xfrm>
           <a:prstGeom prst="rect">
@@ -3290,7 +3294,7 @@
               </a:defRPr>
             </a:pPr>
             <a:r>
-              <a:t>MÉTODO MODO LÍDER</a:t>
+              <a:t>MÉTODO MODO LÍDER • ROMINA MONTIEL</a:t>
             </a:r>
           </a:p>
         </p:txBody>
@@ -3328,6 +3332,774 @@
             <a:avLst/>
           </a:prstGeom>
           <a:solidFill>
+            <a:srgbClr val="F8F9FB"/>
+          </a:solidFill>
+          <a:ln>
+            <a:noFill/>
+          </a:ln>
+        </p:spPr>
+        <p:style>
+          <a:lnRef idx="1">
+            <a:schemeClr val="accent1"/>
+          </a:lnRef>
+          <a:fillRef idx="3">
+            <a:schemeClr val="accent1"/>
+          </a:fillRef>
+          <a:effectRef idx="2">
+            <a:schemeClr val="accent1"/>
+          </a:effectRef>
+          <a:fontRef idx="minor">
+            <a:schemeClr val="lt1"/>
+          </a:fontRef>
+        </p:style>
+        <p:txBody>
+          <a:bodyPr rtlCol="0" anchor="ctr"/>
+          <a:lstStyle/>
+          <a:p>
+            <a:pPr algn="ctr"/>
+          </a:p>
+        </p:txBody>
+      </p:sp>
+      <p:sp>
+        <p:nvSpPr>
+          <p:cNvPr id="3" name="TextBox 2"/>
+          <p:cNvSpPr txBox="1"/>
+          <p:nvPr/>
+        </p:nvSpPr>
+        <p:spPr>
+          <a:xfrm>
+            <a:off x="731520" y="365760"/>
+            <a:ext cx="10728655" cy="320040"/>
+          </a:xfrm>
+          <a:prstGeom prst="rect">
+            <a:avLst/>
+          </a:prstGeom>
+          <a:noFill/>
+        </p:spPr>
+        <p:txBody>
+          <a:bodyPr wrap="square" lIns="0" tIns="0" rIns="0" bIns="0">
+            <a:spAutoFit/>
+          </a:bodyPr>
+          <a:lstStyle/>
+          <a:p>
+            <a:pPr>
+              <a:defRPr sz="1000" b="1">
+                <a:solidFill>
+                  <a:srgbClr val="B4871E"/>
+                </a:solidFill>
+                <a:latin typeface="Montserrat"/>
+              </a:defRPr>
+            </a:pPr>
+            <a:r>
+              <a:t>PILAR 6 • MODO LÍDER</a:t>
+            </a:r>
+          </a:p>
+        </p:txBody>
+      </p:sp>
+      <p:sp>
+        <p:nvSpPr>
+          <p:cNvPr id="4" name="TextBox 3"/>
+          <p:cNvSpPr txBox="1"/>
+          <p:nvPr/>
+        </p:nvSpPr>
+        <p:spPr>
+          <a:xfrm>
+            <a:off x="731520" y="685800"/>
+            <a:ext cx="10728655" cy="777240"/>
+          </a:xfrm>
+          <a:prstGeom prst="rect">
+            <a:avLst/>
+          </a:prstGeom>
+          <a:noFill/>
+        </p:spPr>
+        <p:txBody>
+          <a:bodyPr wrap="square" lIns="0" tIns="0" rIns="0" bIns="0">
+            <a:spAutoFit/>
+          </a:bodyPr>
+          <a:lstStyle/>
+          <a:p>
+            <a:pPr>
+              <a:defRPr sz="2100" b="1">
+                <a:solidFill>
+                  <a:srgbClr val="1B1F2A"/>
+                </a:solidFill>
+                <a:latin typeface="Montserrat"/>
+              </a:defRPr>
+            </a:pPr>
+            <a:r>
+              <a:t>Pilar 6: Gestiona para Crecer (Salir de lo Urgente)</a:t>
+            </a:r>
+          </a:p>
+        </p:txBody>
+      </p:sp>
+      <p:sp>
+        <p:nvSpPr>
+          <p:cNvPr id="5" name="Rounded Rectangle 4"/>
+          <p:cNvSpPr/>
+          <p:nvPr/>
+        </p:nvSpPr>
+        <p:spPr>
+          <a:xfrm>
+            <a:off x="731520" y="1554480"/>
+            <a:ext cx="5212080" cy="4663440"/>
+          </a:xfrm>
+          <a:prstGeom prst="roundRect">
+            <a:avLst/>
+          </a:prstGeom>
+          <a:solidFill>
+            <a:srgbClr val="FFFFFF"/>
+          </a:solidFill>
+          <a:ln w="12700">
+            <a:solidFill>
+              <a:srgbClr val="E2E6EE"/>
+            </a:solidFill>
+          </a:ln>
+        </p:spPr>
+        <p:style>
+          <a:lnRef idx="1">
+            <a:schemeClr val="accent1"/>
+          </a:lnRef>
+          <a:fillRef idx="3">
+            <a:schemeClr val="accent1"/>
+          </a:fillRef>
+          <a:effectRef idx="2">
+            <a:schemeClr val="accent1"/>
+          </a:effectRef>
+          <a:fontRef idx="minor">
+            <a:schemeClr val="lt1"/>
+          </a:fontRef>
+        </p:style>
+        <p:txBody>
+          <a:bodyPr rtlCol="0" anchor="ctr"/>
+          <a:lstStyle/>
+          <a:p>
+            <a:pPr algn="ctr"/>
+          </a:p>
+        </p:txBody>
+      </p:sp>
+      <p:sp>
+        <p:nvSpPr>
+          <p:cNvPr id="6" name="TextBox 5"/>
+          <p:cNvSpPr txBox="1"/>
+          <p:nvPr/>
+        </p:nvSpPr>
+        <p:spPr>
+          <a:xfrm>
+            <a:off x="1005840" y="1737360"/>
+            <a:ext cx="4663440" cy="4297680"/>
+          </a:xfrm>
+          <a:prstGeom prst="rect">
+            <a:avLst/>
+          </a:prstGeom>
+          <a:noFill/>
+        </p:spPr>
+        <p:txBody>
+          <a:bodyPr wrap="square">
+            <a:spAutoFit/>
+          </a:bodyPr>
+          <a:lstStyle/>
+          <a:p>
+            <a:pPr>
+              <a:defRPr sz="1300" b="1">
+                <a:solidFill>
+                  <a:srgbClr val="E94560"/>
+                </a:solidFill>
+                <a:latin typeface="Montserrat"/>
+              </a:defRPr>
+            </a:pPr>
+            <a:r>
+              <a:t>DEJAR EL 'MODO BOMBERO'</a:t>
+            </a:r>
+          </a:p>
+          <a:p>
+            <a:pPr>
+              <a:spcBef>
+                <a:spcPts val="1000"/>
+              </a:spcBef>
+              <a:defRPr sz="1250">
+                <a:solidFill>
+                  <a:srgbClr val="1B1F2A"/>
+                </a:solidFill>
+                <a:latin typeface="Montserrat"/>
+              </a:defRPr>
+            </a:pPr>
+            <a:r>
+              <a:t>Muchos emprendedores pasan sus días apagando incendios y resolviendo solo lo urgente.</a:t>
+            </a:r>
+            <a:br/>
+            <a:br/>
+            <a:r>
+              <a:t>Eso no es liderar un negocio, es ser esclavo de las operaciones diarias sin tiempo para construir el futuro.</a:t>
+            </a:r>
+          </a:p>
+        </p:txBody>
+      </p:sp>
+      <p:sp>
+        <p:nvSpPr>
+          <p:cNvPr id="7" name="Rounded Rectangle 6"/>
+          <p:cNvSpPr/>
+          <p:nvPr/>
+        </p:nvSpPr>
+        <p:spPr>
+          <a:xfrm>
+            <a:off x="6217920" y="1554480"/>
+            <a:ext cx="5212080" cy="4663440"/>
+          </a:xfrm>
+          <a:prstGeom prst="roundRect">
+            <a:avLst/>
+          </a:prstGeom>
+          <a:solidFill>
+            <a:srgbClr val="FFFFFF"/>
+          </a:solidFill>
+          <a:ln w="12700">
+            <a:solidFill>
+              <a:srgbClr val="E2E6EE"/>
+            </a:solidFill>
+          </a:ln>
+        </p:spPr>
+        <p:style>
+          <a:lnRef idx="1">
+            <a:schemeClr val="accent1"/>
+          </a:lnRef>
+          <a:fillRef idx="3">
+            <a:schemeClr val="accent1"/>
+          </a:fillRef>
+          <a:effectRef idx="2">
+            <a:schemeClr val="accent1"/>
+          </a:effectRef>
+          <a:fontRef idx="minor">
+            <a:schemeClr val="lt1"/>
+          </a:fontRef>
+        </p:style>
+        <p:txBody>
+          <a:bodyPr rtlCol="0" anchor="ctr"/>
+          <a:lstStyle/>
+          <a:p>
+            <a:pPr algn="ctr"/>
+          </a:p>
+        </p:txBody>
+      </p:sp>
+      <p:sp>
+        <p:nvSpPr>
+          <p:cNvPr id="8" name="TextBox 7"/>
+          <p:cNvSpPr txBox="1"/>
+          <p:nvPr/>
+        </p:nvSpPr>
+        <p:spPr>
+          <a:xfrm>
+            <a:off x="6492240" y="1737360"/>
+            <a:ext cx="4663440" cy="4297680"/>
+          </a:xfrm>
+          <a:prstGeom prst="rect">
+            <a:avLst/>
+          </a:prstGeom>
+          <a:noFill/>
+        </p:spPr>
+        <p:txBody>
+          <a:bodyPr wrap="square">
+            <a:spAutoFit/>
+          </a:bodyPr>
+          <a:lstStyle/>
+          <a:p>
+            <a:pPr>
+              <a:defRPr sz="1300" b="1">
+                <a:solidFill>
+                  <a:srgbClr val="B4871E"/>
+                </a:solidFill>
+                <a:latin typeface="Montserrat"/>
+              </a:defRPr>
+            </a:pPr>
+            <a:r>
+              <a:t>CONSTRUIR ESCALABILIDAD REAL</a:t>
+            </a:r>
+          </a:p>
+          <a:p>
+            <a:pPr>
+              <a:spcBef>
+                <a:spcPts val="1000"/>
+              </a:spcBef>
+              <a:defRPr sz="1250">
+                <a:solidFill>
+                  <a:srgbClr val="1B1F2A"/>
+                </a:solidFill>
+                <a:latin typeface="Montserrat"/>
+              </a:defRPr>
+            </a:pPr>
+            <a:r>
+              <a:t>📊 Mira indicadores y resultados reales (KPIs).</a:t>
+            </a:r>
+            <a:br/>
+            <a:r>
+              <a:t>⚙️ Estandariza procesos repetitivos y operaciones.</a:t>
+            </a:r>
+            <a:br/>
+            <a:r>
+              <a:t>👥 Optimiza la experiencia y retención de clientes.</a:t>
+            </a:r>
+            <a:br/>
+            <a:r>
+              <a:t>🔋 Construye un negocio que crezca sin depender 100% de tu energía física.</a:t>
+            </a:r>
+          </a:p>
+        </p:txBody>
+      </p:sp>
+    </p:spTree>
+  </p:cSld>
+  <p:clrMapOvr>
+    <a:masterClrMapping/>
+  </p:clrMapOvr>
+</p:sld>
+</file>
+
+<file path=ppt/slides/slide11.xml><?xml version="1.0" encoding="utf-8"?>
+<p:sld xmlns:a="http://schemas.openxmlformats.org/drawingml/2006/main" xmlns:p="http://schemas.openxmlformats.org/presentationml/2006/main" xmlns:r="http://schemas.openxmlformats.org/officeDocument/2006/relationships">
+  <p:cSld>
+    <p:spTree>
+      <p:nvGrpSpPr>
+        <p:cNvPr id="1" name=""/>
+        <p:cNvGrpSpPr/>
+        <p:nvPr/>
+      </p:nvGrpSpPr>
+      <p:grpSpPr/>
+      <p:sp>
+        <p:nvSpPr>
+          <p:cNvPr id="2" name="Rectangle 1"/>
+          <p:cNvSpPr/>
+          <p:nvPr/>
+        </p:nvSpPr>
+        <p:spPr>
+          <a:xfrm>
+            <a:off x="0" y="0"/>
+            <a:ext cx="12191695" cy="6858000"/>
+          </a:xfrm>
+          <a:prstGeom prst="rect">
+            <a:avLst/>
+          </a:prstGeom>
+          <a:solidFill>
+            <a:srgbClr val="F8F9FB"/>
+          </a:solidFill>
+          <a:ln>
+            <a:noFill/>
+          </a:ln>
+        </p:spPr>
+        <p:style>
+          <a:lnRef idx="1">
+            <a:schemeClr val="accent1"/>
+          </a:lnRef>
+          <a:fillRef idx="3">
+            <a:schemeClr val="accent1"/>
+          </a:fillRef>
+          <a:effectRef idx="2">
+            <a:schemeClr val="accent1"/>
+          </a:effectRef>
+          <a:fontRef idx="minor">
+            <a:schemeClr val="lt1"/>
+          </a:fontRef>
+        </p:style>
+        <p:txBody>
+          <a:bodyPr rtlCol="0" anchor="ctr"/>
+          <a:lstStyle/>
+          <a:p>
+            <a:pPr algn="ctr"/>
+          </a:p>
+        </p:txBody>
+      </p:sp>
+      <p:sp>
+        <p:nvSpPr>
+          <p:cNvPr id="3" name="TextBox 2"/>
+          <p:cNvSpPr txBox="1"/>
+          <p:nvPr/>
+        </p:nvSpPr>
+        <p:spPr>
+          <a:xfrm>
+            <a:off x="731520" y="365760"/>
+            <a:ext cx="10728655" cy="320040"/>
+          </a:xfrm>
+          <a:prstGeom prst="rect">
+            <a:avLst/>
+          </a:prstGeom>
+          <a:noFill/>
+        </p:spPr>
+        <p:txBody>
+          <a:bodyPr wrap="square" lIns="0" tIns="0" rIns="0" bIns="0">
+            <a:spAutoFit/>
+          </a:bodyPr>
+          <a:lstStyle/>
+          <a:p>
+            <a:pPr>
+              <a:defRPr sz="1000" b="1">
+                <a:solidFill>
+                  <a:srgbClr val="B4871E"/>
+                </a:solidFill>
+                <a:latin typeface="Montserrat"/>
+              </a:defRPr>
+            </a:pPr>
+            <a:r>
+              <a:t>PILAR 7 • MODO LÍDER</a:t>
+            </a:r>
+          </a:p>
+        </p:txBody>
+      </p:sp>
+      <p:sp>
+        <p:nvSpPr>
+          <p:cNvPr id="4" name="TextBox 3"/>
+          <p:cNvSpPr txBox="1"/>
+          <p:nvPr/>
+        </p:nvSpPr>
+        <p:spPr>
+          <a:xfrm>
+            <a:off x="731520" y="685800"/>
+            <a:ext cx="10728655" cy="777240"/>
+          </a:xfrm>
+          <a:prstGeom prst="rect">
+            <a:avLst/>
+          </a:prstGeom>
+          <a:noFill/>
+        </p:spPr>
+        <p:txBody>
+          <a:bodyPr wrap="square" lIns="0" tIns="0" rIns="0" bIns="0">
+            <a:spAutoFit/>
+          </a:bodyPr>
+          <a:lstStyle/>
+          <a:p>
+            <a:pPr>
+              <a:defRPr sz="2100" b="1">
+                <a:solidFill>
+                  <a:srgbClr val="1B1F2A"/>
+                </a:solidFill>
+                <a:latin typeface="Montserrat"/>
+              </a:defRPr>
+            </a:pPr>
+            <a:r>
+              <a:t>Pilar 7: Lidera con Responsabilidad</a:t>
+            </a:r>
+          </a:p>
+        </p:txBody>
+      </p:sp>
+      <p:sp>
+        <p:nvSpPr>
+          <p:cNvPr id="5" name="Rounded Rectangle 4"/>
+          <p:cNvSpPr/>
+          <p:nvPr/>
+        </p:nvSpPr>
+        <p:spPr>
+          <a:xfrm>
+            <a:off x="731520" y="1554480"/>
+            <a:ext cx="3474720" cy="4663440"/>
+          </a:xfrm>
+          <a:prstGeom prst="roundRect">
+            <a:avLst/>
+          </a:prstGeom>
+          <a:solidFill>
+            <a:srgbClr val="FFFFFF"/>
+          </a:solidFill>
+          <a:ln w="12700">
+            <a:solidFill>
+              <a:srgbClr val="E2E6EE"/>
+            </a:solidFill>
+          </a:ln>
+        </p:spPr>
+        <p:style>
+          <a:lnRef idx="1">
+            <a:schemeClr val="accent1"/>
+          </a:lnRef>
+          <a:fillRef idx="3">
+            <a:schemeClr val="accent1"/>
+          </a:fillRef>
+          <a:effectRef idx="2">
+            <a:schemeClr val="accent1"/>
+          </a:effectRef>
+          <a:fontRef idx="minor">
+            <a:schemeClr val="lt1"/>
+          </a:fontRef>
+        </p:style>
+        <p:txBody>
+          <a:bodyPr rtlCol="0" anchor="ctr"/>
+          <a:lstStyle/>
+          <a:p>
+            <a:pPr algn="ctr"/>
+          </a:p>
+        </p:txBody>
+      </p:sp>
+      <p:sp>
+        <p:nvSpPr>
+          <p:cNvPr id="6" name="TextBox 5"/>
+          <p:cNvSpPr txBox="1"/>
+          <p:nvPr/>
+        </p:nvSpPr>
+        <p:spPr>
+          <a:xfrm>
+            <a:off x="914400" y="2011680"/>
+            <a:ext cx="3108960" cy="3931920"/>
+          </a:xfrm>
+          <a:prstGeom prst="rect">
+            <a:avLst/>
+          </a:prstGeom>
+          <a:noFill/>
+        </p:spPr>
+        <p:txBody>
+          <a:bodyPr wrap="square">
+            <a:spAutoFit/>
+          </a:bodyPr>
+          <a:lstStyle/>
+          <a:p>
+            <a:pPr>
+              <a:defRPr sz="1300" b="1">
+                <a:solidFill>
+                  <a:srgbClr val="1B1F2A"/>
+                </a:solidFill>
+                <a:latin typeface="Montserrat"/>
+              </a:defRPr>
+            </a:pPr>
+            <a:r>
+              <a:t>CUIDAR LAS RELACIONES</a:t>
+            </a:r>
+          </a:p>
+          <a:p>
+            <a:pPr>
+              <a:spcBef>
+                <a:spcPts val="1200"/>
+              </a:spcBef>
+              <a:defRPr sz="1250">
+                <a:solidFill>
+                  <a:srgbClr val="1B1F2A"/>
+                </a:solidFill>
+                <a:latin typeface="Montserrat"/>
+              </a:defRPr>
+            </a:pPr>
+            <a:r>
+              <a:t>Cuida el vínculo con clientes, colaboradores y proveedores desde el respeto mutuo y la excelencia.</a:t>
+            </a:r>
+          </a:p>
+        </p:txBody>
+      </p:sp>
+      <p:sp>
+        <p:nvSpPr>
+          <p:cNvPr id="7" name="Rounded Rectangle 6"/>
+          <p:cNvSpPr/>
+          <p:nvPr/>
+        </p:nvSpPr>
+        <p:spPr>
+          <a:xfrm>
+            <a:off x="4343400" y="1554480"/>
+            <a:ext cx="3474720" cy="4663440"/>
+          </a:xfrm>
+          <a:prstGeom prst="roundRect">
+            <a:avLst/>
+          </a:prstGeom>
+          <a:solidFill>
+            <a:srgbClr val="FFFFFF"/>
+          </a:solidFill>
+          <a:ln w="12700">
+            <a:solidFill>
+              <a:srgbClr val="E2E6EE"/>
+            </a:solidFill>
+          </a:ln>
+        </p:spPr>
+        <p:style>
+          <a:lnRef idx="1">
+            <a:schemeClr val="accent1"/>
+          </a:lnRef>
+          <a:fillRef idx="3">
+            <a:schemeClr val="accent1"/>
+          </a:fillRef>
+          <a:effectRef idx="2">
+            <a:schemeClr val="accent1"/>
+          </a:effectRef>
+          <a:fontRef idx="minor">
+            <a:schemeClr val="lt1"/>
+          </a:fontRef>
+        </p:style>
+        <p:txBody>
+          <a:bodyPr rtlCol="0" anchor="ctr"/>
+          <a:lstStyle/>
+          <a:p>
+            <a:pPr algn="ctr"/>
+          </a:p>
+        </p:txBody>
+      </p:sp>
+      <p:sp>
+        <p:nvSpPr>
+          <p:cNvPr id="8" name="TextBox 7"/>
+          <p:cNvSpPr txBox="1"/>
+          <p:nvPr/>
+        </p:nvSpPr>
+        <p:spPr>
+          <a:xfrm>
+            <a:off x="4526280" y="2011680"/>
+            <a:ext cx="3108960" cy="3931920"/>
+          </a:xfrm>
+          <a:prstGeom prst="rect">
+            <a:avLst/>
+          </a:prstGeom>
+          <a:noFill/>
+        </p:spPr>
+        <p:txBody>
+          <a:bodyPr wrap="square">
+            <a:spAutoFit/>
+          </a:bodyPr>
+          <a:lstStyle/>
+          <a:p>
+            <a:pPr>
+              <a:defRPr sz="1300" b="1">
+                <a:solidFill>
+                  <a:srgbClr val="E94560"/>
+                </a:solidFill>
+                <a:latin typeface="Montserrat"/>
+              </a:defRPr>
+            </a:pPr>
+            <a:r>
+              <a:t>NO COMPLACER A TODOS</a:t>
+            </a:r>
+          </a:p>
+          <a:p>
+            <a:pPr>
+              <a:spcBef>
+                <a:spcPts val="1200"/>
+              </a:spcBef>
+              <a:defRPr sz="1250">
+                <a:solidFill>
+                  <a:srgbClr val="1B1F2A"/>
+                </a:solidFill>
+                <a:latin typeface="Montserrat"/>
+              </a:defRPr>
+            </a:pPr>
+            <a:r>
+              <a:t>Liderazgo consciente NO es complacer a todo el mundo. Es sostener la visión y la coherencia del negocio.</a:t>
+            </a:r>
+          </a:p>
+        </p:txBody>
+      </p:sp>
+      <p:sp>
+        <p:nvSpPr>
+          <p:cNvPr id="9" name="Rounded Rectangle 8"/>
+          <p:cNvSpPr/>
+          <p:nvPr/>
+        </p:nvSpPr>
+        <p:spPr>
+          <a:xfrm>
+            <a:off x="7955280" y="1554480"/>
+            <a:ext cx="3474720" cy="4663440"/>
+          </a:xfrm>
+          <a:prstGeom prst="roundRect">
+            <a:avLst/>
+          </a:prstGeom>
+          <a:solidFill>
+            <a:srgbClr val="FFFFFF"/>
+          </a:solidFill>
+          <a:ln w="12700">
+            <a:solidFill>
+              <a:srgbClr val="E2E6EE"/>
+            </a:solidFill>
+          </a:ln>
+        </p:spPr>
+        <p:style>
+          <a:lnRef idx="1">
+            <a:schemeClr val="accent1"/>
+          </a:lnRef>
+          <a:fillRef idx="3">
+            <a:schemeClr val="accent1"/>
+          </a:fillRef>
+          <a:effectRef idx="2">
+            <a:schemeClr val="accent1"/>
+          </a:effectRef>
+          <a:fontRef idx="minor">
+            <a:schemeClr val="lt1"/>
+          </a:fontRef>
+        </p:style>
+        <p:txBody>
+          <a:bodyPr rtlCol="0" anchor="ctr"/>
+          <a:lstStyle/>
+          <a:p>
+            <a:pPr algn="ctr"/>
+          </a:p>
+        </p:txBody>
+      </p:sp>
+      <p:sp>
+        <p:nvSpPr>
+          <p:cNvPr id="10" name="TextBox 9"/>
+          <p:cNvSpPr txBox="1"/>
+          <p:nvPr/>
+        </p:nvSpPr>
+        <p:spPr>
+          <a:xfrm>
+            <a:off x="8138160" y="2011680"/>
+            <a:ext cx="3108960" cy="3931920"/>
+          </a:xfrm>
+          <a:prstGeom prst="rect">
+            <a:avLst/>
+          </a:prstGeom>
+          <a:noFill/>
+        </p:spPr>
+        <p:txBody>
+          <a:bodyPr wrap="square">
+            <a:spAutoFit/>
+          </a:bodyPr>
+          <a:lstStyle/>
+          <a:p>
+            <a:pPr>
+              <a:defRPr sz="1300" b="1">
+                <a:solidFill>
+                  <a:srgbClr val="B4871E"/>
+                </a:solidFill>
+                <a:latin typeface="Montserrat"/>
+              </a:defRPr>
+            </a:pPr>
+            <a:r>
+              <a:t>CONVERSACIONES DIFÍCILES</a:t>
+            </a:r>
+          </a:p>
+          <a:p>
+            <a:pPr>
+              <a:spcBef>
+                <a:spcPts val="1200"/>
+              </a:spcBef>
+              <a:defRPr sz="1250">
+                <a:solidFill>
+                  <a:srgbClr val="1B1F2A"/>
+                </a:solidFill>
+                <a:latin typeface="Montserrat"/>
+              </a:defRPr>
+            </a:pPr>
+            <a:r>
+              <a:t>Tener límites innegociables, sostener conversaciones incómodas y tomar decisiones difíciles con templanza.</a:t>
+            </a:r>
+          </a:p>
+        </p:txBody>
+      </p:sp>
+    </p:spTree>
+  </p:cSld>
+  <p:clrMapOvr>
+    <a:masterClrMapping/>
+  </p:clrMapOvr>
+</p:sld>
+</file>
+
+<file path=ppt/slides/slide12.xml><?xml version="1.0" encoding="utf-8"?>
+<p:sld xmlns:a="http://schemas.openxmlformats.org/drawingml/2006/main" xmlns:p="http://schemas.openxmlformats.org/presentationml/2006/main" xmlns:r="http://schemas.openxmlformats.org/officeDocument/2006/relationships">
+  <p:cSld>
+    <p:spTree>
+      <p:nvGrpSpPr>
+        <p:cNvPr id="1" name=""/>
+        <p:cNvGrpSpPr/>
+        <p:nvPr/>
+      </p:nvGrpSpPr>
+      <p:grpSpPr/>
+      <p:sp>
+        <p:nvSpPr>
+          <p:cNvPr id="2" name="Rectangle 1"/>
+          <p:cNvSpPr/>
+          <p:nvPr/>
+        </p:nvSpPr>
+        <p:spPr>
+          <a:xfrm>
+            <a:off x="0" y="0"/>
+            <a:ext cx="12191695" cy="6858000"/>
+          </a:xfrm>
+          <a:prstGeom prst="rect">
+            <a:avLst/>
+          </a:prstGeom>
+          <a:solidFill>
             <a:srgbClr val="0E121B"/>
           </a:solidFill>
           <a:ln>
@@ -3358,16 +4130,537 @@
       </p:sp>
       <p:sp>
         <p:nvSpPr>
-          <p:cNvPr id="3" name="Rounded Rectangle 2"/>
+          <p:cNvPr id="3" name="TextBox 2"/>
+          <p:cNvSpPr txBox="1"/>
+          <p:nvPr/>
+        </p:nvSpPr>
+        <p:spPr>
+          <a:xfrm>
+            <a:off x="731520" y="365760"/>
+            <a:ext cx="10728655" cy="320040"/>
+          </a:xfrm>
+          <a:prstGeom prst="rect">
+            <a:avLst/>
+          </a:prstGeom>
+          <a:noFill/>
+        </p:spPr>
+        <p:txBody>
+          <a:bodyPr wrap="square" lIns="0" tIns="0" rIns="0" bIns="0">
+            <a:spAutoFit/>
+          </a:bodyPr>
+          <a:lstStyle/>
+          <a:p>
+            <a:pPr>
+              <a:defRPr sz="1000" b="1">
+                <a:solidFill>
+                  <a:srgbClr val="D4AF37"/>
+                </a:solidFill>
+                <a:latin typeface="Montserrat"/>
+              </a:defRPr>
+            </a:pPr>
+            <a:r>
+              <a:t>MÉTODO MODO LÍDER</a:t>
+            </a:r>
+          </a:p>
+        </p:txBody>
+      </p:sp>
+      <p:sp>
+        <p:nvSpPr>
+          <p:cNvPr id="4" name="TextBox 3"/>
+          <p:cNvSpPr txBox="1"/>
+          <p:nvPr/>
+        </p:nvSpPr>
+        <p:spPr>
+          <a:xfrm>
+            <a:off x="731520" y="685800"/>
+            <a:ext cx="10728655" cy="777240"/>
+          </a:xfrm>
+          <a:prstGeom prst="rect">
+            <a:avLst/>
+          </a:prstGeom>
+          <a:noFill/>
+        </p:spPr>
+        <p:txBody>
+          <a:bodyPr wrap="square" lIns="0" tIns="0" rIns="0" bIns="0">
+            <a:spAutoFit/>
+          </a:bodyPr>
+          <a:lstStyle/>
+          <a:p>
+            <a:pPr>
+              <a:defRPr sz="2100" b="1">
+                <a:solidFill>
+                  <a:srgbClr val="F5F5F7"/>
+                </a:solidFill>
+                <a:latin typeface="Montserrat"/>
+              </a:defRPr>
+            </a:pPr>
+            <a:r>
+              <a:t>La Secuencia de Éxito en Modo Líder</a:t>
+            </a:r>
+          </a:p>
+        </p:txBody>
+      </p:sp>
+      <p:sp>
+        <p:nvSpPr>
+          <p:cNvPr id="5" name="Rounded Rectangle 4"/>
           <p:cNvSpPr/>
           <p:nvPr/>
         </p:nvSpPr>
         <p:spPr>
           <a:xfrm>
-            <a:off x="914400" y="914400"/>
-            <a:ext cx="10362895" cy="5029200"/>
+            <a:off x="731520" y="2011680"/>
+            <a:ext cx="2560320" cy="3840480"/>
           </a:xfrm>
           <a:prstGeom prst="roundRect">
+            <a:avLst/>
+          </a:prstGeom>
+          <a:solidFill>
+            <a:srgbClr val="161A25"/>
+          </a:solidFill>
+          <a:ln w="12700">
+            <a:solidFill>
+              <a:srgbClr val="D4AF37"/>
+            </a:solidFill>
+          </a:ln>
+        </p:spPr>
+        <p:style>
+          <a:lnRef idx="1">
+            <a:schemeClr val="accent1"/>
+          </a:lnRef>
+          <a:fillRef idx="3">
+            <a:schemeClr val="accent1"/>
+          </a:fillRef>
+          <a:effectRef idx="2">
+            <a:schemeClr val="accent1"/>
+          </a:effectRef>
+          <a:fontRef idx="minor">
+            <a:schemeClr val="lt1"/>
+          </a:fontRef>
+        </p:style>
+        <p:txBody>
+          <a:bodyPr rtlCol="0" anchor="ctr"/>
+          <a:lstStyle/>
+          <a:p>
+            <a:pPr algn="ctr"/>
+          </a:p>
+        </p:txBody>
+      </p:sp>
+      <p:sp>
+        <p:nvSpPr>
+          <p:cNvPr id="6" name="TextBox 5"/>
+          <p:cNvSpPr txBox="1"/>
+          <p:nvPr/>
+        </p:nvSpPr>
+        <p:spPr>
+          <a:xfrm>
+            <a:off x="868680" y="2286000"/>
+            <a:ext cx="2286000" cy="3291840"/>
+          </a:xfrm>
+          <a:prstGeom prst="rect">
+            <a:avLst/>
+          </a:prstGeom>
+          <a:noFill/>
+        </p:spPr>
+        <p:txBody>
+          <a:bodyPr wrap="square">
+            <a:spAutoFit/>
+          </a:bodyPr>
+          <a:lstStyle/>
+          <a:p>
+            <a:pPr>
+              <a:defRPr sz="1400" b="1">
+                <a:solidFill>
+                  <a:srgbClr val="D4AF37"/>
+                </a:solidFill>
+                <a:latin typeface="Montserrat"/>
+              </a:defRPr>
+            </a:pPr>
+            <a:r>
+              <a:t>1. CLARIDAD</a:t>
+            </a:r>
+          </a:p>
+          <a:p>
+            <a:pPr>
+              <a:spcBef>
+                <a:spcPts val="1200"/>
+              </a:spcBef>
+              <a:defRPr sz="1200">
+                <a:solidFill>
+                  <a:srgbClr val="F5F5F7"/>
+                </a:solidFill>
+                <a:latin typeface="Montserrat"/>
+              </a:defRPr>
+            </a:pPr>
+            <a:r>
+              <a:t>Saber exactamente qué construyes, a quién sirves y cuáles son tus límites.</a:t>
+            </a:r>
+          </a:p>
+        </p:txBody>
+      </p:sp>
+      <p:sp>
+        <p:nvSpPr>
+          <p:cNvPr id="7" name="Rounded Rectangle 6"/>
+          <p:cNvSpPr/>
+          <p:nvPr/>
+        </p:nvSpPr>
+        <p:spPr>
+          <a:xfrm>
+            <a:off x="3429000" y="2011680"/>
+            <a:ext cx="2560320" cy="3840480"/>
+          </a:xfrm>
+          <a:prstGeom prst="roundRect">
+            <a:avLst/>
+          </a:prstGeom>
+          <a:solidFill>
+            <a:srgbClr val="161A25"/>
+          </a:solidFill>
+          <a:ln w="12700">
+            <a:solidFill>
+              <a:srgbClr val="323C50"/>
+            </a:solidFill>
+          </a:ln>
+        </p:spPr>
+        <p:style>
+          <a:lnRef idx="1">
+            <a:schemeClr val="accent1"/>
+          </a:lnRef>
+          <a:fillRef idx="3">
+            <a:schemeClr val="accent1"/>
+          </a:fillRef>
+          <a:effectRef idx="2">
+            <a:schemeClr val="accent1"/>
+          </a:effectRef>
+          <a:fontRef idx="minor">
+            <a:schemeClr val="lt1"/>
+          </a:fontRef>
+        </p:style>
+        <p:txBody>
+          <a:bodyPr rtlCol="0" anchor="ctr"/>
+          <a:lstStyle/>
+          <a:p>
+            <a:pPr algn="ctr"/>
+          </a:p>
+        </p:txBody>
+      </p:sp>
+      <p:sp>
+        <p:nvSpPr>
+          <p:cNvPr id="8" name="TextBox 7"/>
+          <p:cNvSpPr txBox="1"/>
+          <p:nvPr/>
+        </p:nvSpPr>
+        <p:spPr>
+          <a:xfrm>
+            <a:off x="3566160" y="2286000"/>
+            <a:ext cx="2286000" cy="3291840"/>
+          </a:xfrm>
+          <a:prstGeom prst="rect">
+            <a:avLst/>
+          </a:prstGeom>
+          <a:noFill/>
+        </p:spPr>
+        <p:txBody>
+          <a:bodyPr wrap="square">
+            <a:spAutoFit/>
+          </a:bodyPr>
+          <a:lstStyle/>
+          <a:p>
+            <a:pPr>
+              <a:defRPr sz="1400" b="1">
+                <a:solidFill>
+                  <a:srgbClr val="D4AF37"/>
+                </a:solidFill>
+                <a:latin typeface="Montserrat"/>
+              </a:defRPr>
+            </a:pPr>
+            <a:r>
+              <a:t>2. DIRECCIÓN</a:t>
+            </a:r>
+          </a:p>
+          <a:p>
+            <a:pPr>
+              <a:spcBef>
+                <a:spcPts val="1200"/>
+              </a:spcBef>
+              <a:defRPr sz="1200">
+                <a:solidFill>
+                  <a:srgbClr val="F5F5F7"/>
+                </a:solidFill>
+                <a:latin typeface="Montserrat"/>
+              </a:defRPr>
+            </a:pPr>
+            <a:r>
+              <a:t>Trazar el rumbo estratégico y los objetivos financieros innegociables.</a:t>
+            </a:r>
+          </a:p>
+        </p:txBody>
+      </p:sp>
+      <p:sp>
+        <p:nvSpPr>
+          <p:cNvPr id="9" name="Rounded Rectangle 8"/>
+          <p:cNvSpPr/>
+          <p:nvPr/>
+        </p:nvSpPr>
+        <p:spPr>
+          <a:xfrm>
+            <a:off x="6126480" y="2011680"/>
+            <a:ext cx="2560320" cy="3840480"/>
+          </a:xfrm>
+          <a:prstGeom prst="roundRect">
+            <a:avLst/>
+          </a:prstGeom>
+          <a:solidFill>
+            <a:srgbClr val="161A25"/>
+          </a:solidFill>
+          <a:ln w="12700">
+            <a:solidFill>
+              <a:srgbClr val="323C50"/>
+            </a:solidFill>
+          </a:ln>
+        </p:spPr>
+        <p:style>
+          <a:lnRef idx="1">
+            <a:schemeClr val="accent1"/>
+          </a:lnRef>
+          <a:fillRef idx="3">
+            <a:schemeClr val="accent1"/>
+          </a:fillRef>
+          <a:effectRef idx="2">
+            <a:schemeClr val="accent1"/>
+          </a:effectRef>
+          <a:fontRef idx="minor">
+            <a:schemeClr val="lt1"/>
+          </a:fontRef>
+        </p:style>
+        <p:txBody>
+          <a:bodyPr rtlCol="0" anchor="ctr"/>
+          <a:lstStyle/>
+          <a:p>
+            <a:pPr algn="ctr"/>
+          </a:p>
+        </p:txBody>
+      </p:sp>
+      <p:sp>
+        <p:nvSpPr>
+          <p:cNvPr id="10" name="TextBox 9"/>
+          <p:cNvSpPr txBox="1"/>
+          <p:nvPr/>
+        </p:nvSpPr>
+        <p:spPr>
+          <a:xfrm>
+            <a:off x="6263640" y="2286000"/>
+            <a:ext cx="2286000" cy="3291840"/>
+          </a:xfrm>
+          <a:prstGeom prst="rect">
+            <a:avLst/>
+          </a:prstGeom>
+          <a:noFill/>
+        </p:spPr>
+        <p:txBody>
+          <a:bodyPr wrap="square">
+            <a:spAutoFit/>
+          </a:bodyPr>
+          <a:lstStyle/>
+          <a:p>
+            <a:pPr>
+              <a:defRPr sz="1400" b="1">
+                <a:solidFill>
+                  <a:srgbClr val="D4AF37"/>
+                </a:solidFill>
+                <a:latin typeface="Montserrat"/>
+              </a:defRPr>
+            </a:pPr>
+            <a:r>
+              <a:t>3. GESTIÓN</a:t>
+            </a:r>
+          </a:p>
+          <a:p>
+            <a:pPr>
+              <a:spcBef>
+                <a:spcPts val="1200"/>
+              </a:spcBef>
+              <a:defRPr sz="1200">
+                <a:solidFill>
+                  <a:srgbClr val="F5F5F7"/>
+                </a:solidFill>
+                <a:latin typeface="Montserrat"/>
+              </a:defRPr>
+            </a:pPr>
+            <a:r>
+              <a:t>Organizar números, procesos, ventas y decisiones diarias con disciplina.</a:t>
+            </a:r>
+          </a:p>
+        </p:txBody>
+      </p:sp>
+      <p:sp>
+        <p:nvSpPr>
+          <p:cNvPr id="11" name="Rounded Rectangle 10"/>
+          <p:cNvSpPr/>
+          <p:nvPr/>
+        </p:nvSpPr>
+        <p:spPr>
+          <a:xfrm>
+            <a:off x="8823960" y="2011680"/>
+            <a:ext cx="2560320" cy="3840480"/>
+          </a:xfrm>
+          <a:prstGeom prst="roundRect">
+            <a:avLst/>
+          </a:prstGeom>
+          <a:solidFill>
+            <a:srgbClr val="161A25"/>
+          </a:solidFill>
+          <a:ln w="12700">
+            <a:solidFill>
+              <a:srgbClr val="323C50"/>
+            </a:solidFill>
+          </a:ln>
+        </p:spPr>
+        <p:style>
+          <a:lnRef idx="1">
+            <a:schemeClr val="accent1"/>
+          </a:lnRef>
+          <a:fillRef idx="3">
+            <a:schemeClr val="accent1"/>
+          </a:fillRef>
+          <a:effectRef idx="2">
+            <a:schemeClr val="accent1"/>
+          </a:effectRef>
+          <a:fontRef idx="minor">
+            <a:schemeClr val="lt1"/>
+          </a:fontRef>
+        </p:style>
+        <p:txBody>
+          <a:bodyPr rtlCol="0" anchor="ctr"/>
+          <a:lstStyle/>
+          <a:p>
+            <a:pPr algn="ctr"/>
+          </a:p>
+        </p:txBody>
+      </p:sp>
+      <p:sp>
+        <p:nvSpPr>
+          <p:cNvPr id="12" name="TextBox 11"/>
+          <p:cNvSpPr txBox="1"/>
+          <p:nvPr/>
+        </p:nvSpPr>
+        <p:spPr>
+          <a:xfrm>
+            <a:off x="8961120" y="2286000"/>
+            <a:ext cx="2286000" cy="3291840"/>
+          </a:xfrm>
+          <a:prstGeom prst="rect">
+            <a:avLst/>
+          </a:prstGeom>
+          <a:noFill/>
+        </p:spPr>
+        <p:txBody>
+          <a:bodyPr wrap="square">
+            <a:spAutoFit/>
+          </a:bodyPr>
+          <a:lstStyle/>
+          <a:p>
+            <a:pPr>
+              <a:defRPr sz="1400" b="1">
+                <a:solidFill>
+                  <a:srgbClr val="D4AF37"/>
+                </a:solidFill>
+                <a:latin typeface="Montserrat"/>
+              </a:defRPr>
+            </a:pPr>
+            <a:r>
+              <a:t>4. CRECIMIENTO</a:t>
+            </a:r>
+          </a:p>
+          <a:p>
+            <a:pPr>
+              <a:spcBef>
+                <a:spcPts val="1200"/>
+              </a:spcBef>
+              <a:defRPr sz="1200">
+                <a:solidFill>
+                  <a:srgbClr val="F5F5F7"/>
+                </a:solidFill>
+                <a:latin typeface="Montserrat"/>
+              </a:defRPr>
+            </a:pPr>
+            <a:r>
+              <a:t>Escalar con rentabilidad, impacto sostenible y libertad personal.</a:t>
+            </a:r>
+          </a:p>
+        </p:txBody>
+      </p:sp>
+    </p:spTree>
+  </p:cSld>
+  <p:clrMapOvr>
+    <a:masterClrMapping/>
+  </p:clrMapOvr>
+</p:sld>
+</file>
+
+<file path=ppt/slides/slide13.xml><?xml version="1.0" encoding="utf-8"?>
+<p:sld xmlns:a="http://schemas.openxmlformats.org/drawingml/2006/main" xmlns:p="http://schemas.openxmlformats.org/presentationml/2006/main" xmlns:r="http://schemas.openxmlformats.org/officeDocument/2006/relationships">
+  <p:cSld>
+    <p:spTree>
+      <p:nvGrpSpPr>
+        <p:cNvPr id="1" name=""/>
+        <p:cNvGrpSpPr/>
+        <p:nvPr/>
+      </p:nvGrpSpPr>
+      <p:grpSpPr/>
+      <p:sp>
+        <p:nvSpPr>
+          <p:cNvPr id="2" name="Rectangle 1"/>
+          <p:cNvSpPr/>
+          <p:nvPr/>
+        </p:nvSpPr>
+        <p:spPr>
+          <a:xfrm>
+            <a:off x="0" y="0"/>
+            <a:ext cx="12191695" cy="6858000"/>
+          </a:xfrm>
+          <a:prstGeom prst="rect">
+            <a:avLst/>
+          </a:prstGeom>
+          <a:solidFill>
+            <a:srgbClr val="0E121B"/>
+          </a:solidFill>
+          <a:ln>
+            <a:noFill/>
+          </a:ln>
+        </p:spPr>
+        <p:style>
+          <a:lnRef idx="1">
+            <a:schemeClr val="accent1"/>
+          </a:lnRef>
+          <a:fillRef idx="3">
+            <a:schemeClr val="accent1"/>
+          </a:fillRef>
+          <a:effectRef idx="2">
+            <a:schemeClr val="accent1"/>
+          </a:effectRef>
+          <a:fontRef idx="minor">
+            <a:schemeClr val="lt1"/>
+          </a:fontRef>
+        </p:style>
+        <p:txBody>
+          <a:bodyPr rtlCol="0" anchor="ctr"/>
+          <a:lstStyle/>
+          <a:p>
+            <a:pPr algn="ctr"/>
+          </a:p>
+        </p:txBody>
+      </p:sp>
+      <p:sp>
+        <p:nvSpPr>
+          <p:cNvPr id="3" name="Rectangle 2"/>
+          <p:cNvSpPr/>
+          <p:nvPr/>
+        </p:nvSpPr>
+        <p:spPr>
+          <a:xfrm>
+            <a:off x="1097280" y="1097280"/>
+            <a:ext cx="9997135" cy="4663440"/>
+          </a:xfrm>
+          <a:prstGeom prst="rect">
             <a:avLst/>
           </a:prstGeom>
           <a:solidFill>
@@ -3394,10 +4687,36 @@
           </a:fontRef>
         </p:style>
         <p:txBody>
-          <a:bodyPr rtlCol="0" anchor="ctr" wrap="square" tIns="914400" lIns="731520" rIns="731520"/>
-          <a:lstStyle/>
-          <a:p>
-            <a:pPr algn="ctr">
+          <a:bodyPr rtlCol="0" anchor="ctr"/>
+          <a:lstStyle/>
+          <a:p>
+            <a:pPr algn="ctr"/>
+          </a:p>
+        </p:txBody>
+      </p:sp>
+      <p:sp>
+        <p:nvSpPr>
+          <p:cNvPr id="4" name="TextBox 3"/>
+          <p:cNvSpPr txBox="1"/>
+          <p:nvPr/>
+        </p:nvSpPr>
+        <p:spPr>
+          <a:xfrm>
+            <a:off x="1645920" y="1463040"/>
+            <a:ext cx="8899855" cy="3931920"/>
+          </a:xfrm>
+          <a:prstGeom prst="rect">
+            <a:avLst/>
+          </a:prstGeom>
+          <a:noFill/>
+        </p:spPr>
+        <p:txBody>
+          <a:bodyPr wrap="square">
+            <a:spAutoFit/>
+          </a:bodyPr>
+          <a:lstStyle/>
+          <a:p>
+            <a:pPr>
               <a:defRPr sz="1200" b="1">
                 <a:solidFill>
                   <a:srgbClr val="D4AF37"/>
@@ -3406,21 +4725,415 @@
               </a:defRPr>
             </a:pPr>
             <a:r>
-              <a:t>EL ENFOQUE DEL CURSO</a:t>
+              <a:t>DEFINICIÓN DEFINITIVA</a:t>
+            </a:r>
+          </a:p>
+          <a:p>
+            <a:pPr>
+              <a:spcBef>
+                <a:spcPts val="1400"/>
+              </a:spcBef>
+              <a:defRPr sz="2000" b="1">
+                <a:solidFill>
+                  <a:srgbClr val="F5F5F7"/>
+                </a:solidFill>
+                <a:latin typeface="Montserrat"/>
+              </a:defRPr>
+            </a:pPr>
+            <a:r>
+              <a:t>“Un empresario consciente no es aquel que hace negocios de manera perfecta.</a:t>
             </a:r>
             <a:br/>
-          </a:p>
-          <a:p>
-            <a:pPr algn="ctr">
-              <a:defRPr sz="1650" b="1">
-                <a:solidFill>
-                  <a:srgbClr val="F5F5F7"/>
-                </a:solidFill>
-                <a:latin typeface="Montserrat"/>
-              </a:defRPr>
-            </a:pPr>
-            <a:r>
-              <a:t>“Vamos a aprender a construir un negocio sin desconectarnos de nosotras mismas, pero tampoco vamos a romantizarlo porque emprender es crear un negocio que genere renta que te sustente a vos y tu estilo de vida . Vamos a hablar de propósito, dinero, ventas, de mentalidad y autoliderazgo, pero también de estrategias claves y acción consciente para generar negocios con valor de marca e impacto real que atrae dinero.”</a:t>
+            <a:br/>
+            <a:r>
+              <a:t>Es aquel que sabe desde dónde está gestionando, hacia dónde quiere ir, qué quiere construir y qué está dispuesto —y qué no— a hacer para conseguirlo.”</a:t>
+            </a:r>
+          </a:p>
+          <a:p>
+            <a:pPr>
+              <a:spcBef>
+                <a:spcPts val="1600"/>
+              </a:spcBef>
+              <a:defRPr sz="1400" b="1">
+                <a:solidFill>
+                  <a:srgbClr val="D4AF37"/>
+                </a:solidFill>
+                <a:latin typeface="Montserrat"/>
+              </a:defRPr>
+            </a:pPr>
+            <a:r>
+              <a:t>Primero Claridad. Después Dirección. Después Gestión. Y finalmente Crecimiento.</a:t>
+            </a:r>
+          </a:p>
+        </p:txBody>
+      </p:sp>
+    </p:spTree>
+  </p:cSld>
+  <p:clrMapOvr>
+    <a:masterClrMapping/>
+  </p:clrMapOvr>
+</p:sld>
+</file>
+
+<file path=ppt/slides/slide14.xml><?xml version="1.0" encoding="utf-8"?>
+<p:sld xmlns:a="http://schemas.openxmlformats.org/drawingml/2006/main" xmlns:p="http://schemas.openxmlformats.org/presentationml/2006/main" xmlns:r="http://schemas.openxmlformats.org/officeDocument/2006/relationships">
+  <p:cSld>
+    <p:spTree>
+      <p:nvGrpSpPr>
+        <p:cNvPr id="1" name=""/>
+        <p:cNvGrpSpPr/>
+        <p:nvPr/>
+      </p:nvGrpSpPr>
+      <p:grpSpPr/>
+      <p:sp>
+        <p:nvSpPr>
+          <p:cNvPr id="2" name="Rectangle 1"/>
+          <p:cNvSpPr/>
+          <p:nvPr/>
+        </p:nvSpPr>
+        <p:spPr>
+          <a:xfrm>
+            <a:off x="0" y="0"/>
+            <a:ext cx="12191695" cy="6858000"/>
+          </a:xfrm>
+          <a:prstGeom prst="rect">
+            <a:avLst/>
+          </a:prstGeom>
+          <a:solidFill>
+            <a:srgbClr val="F8F9FB"/>
+          </a:solidFill>
+          <a:ln>
+            <a:noFill/>
+          </a:ln>
+        </p:spPr>
+        <p:style>
+          <a:lnRef idx="1">
+            <a:schemeClr val="accent1"/>
+          </a:lnRef>
+          <a:fillRef idx="3">
+            <a:schemeClr val="accent1"/>
+          </a:fillRef>
+          <a:effectRef idx="2">
+            <a:schemeClr val="accent1"/>
+          </a:effectRef>
+          <a:fontRef idx="minor">
+            <a:schemeClr val="lt1"/>
+          </a:fontRef>
+        </p:style>
+        <p:txBody>
+          <a:bodyPr rtlCol="0" anchor="ctr"/>
+          <a:lstStyle/>
+          <a:p>
+            <a:pPr algn="ctr"/>
+          </a:p>
+        </p:txBody>
+      </p:sp>
+      <p:sp>
+        <p:nvSpPr>
+          <p:cNvPr id="3" name="TextBox 2"/>
+          <p:cNvSpPr txBox="1"/>
+          <p:nvPr/>
+        </p:nvSpPr>
+        <p:spPr>
+          <a:xfrm>
+            <a:off x="731520" y="365760"/>
+            <a:ext cx="10728655" cy="320040"/>
+          </a:xfrm>
+          <a:prstGeom prst="rect">
+            <a:avLst/>
+          </a:prstGeom>
+          <a:noFill/>
+        </p:spPr>
+        <p:txBody>
+          <a:bodyPr wrap="square" lIns="0" tIns="0" rIns="0" bIns="0">
+            <a:spAutoFit/>
+          </a:bodyPr>
+          <a:lstStyle/>
+          <a:p>
+            <a:pPr>
+              <a:defRPr sz="1000" b="1">
+                <a:solidFill>
+                  <a:srgbClr val="B4871E"/>
+                </a:solidFill>
+                <a:latin typeface="Montserrat"/>
+              </a:defRPr>
+            </a:pPr>
+            <a:r>
+              <a:t>ACTIVACIÓN PRÁCTICA • CLASE 1</a:t>
+            </a:r>
+          </a:p>
+        </p:txBody>
+      </p:sp>
+      <p:sp>
+        <p:nvSpPr>
+          <p:cNvPr id="4" name="TextBox 3"/>
+          <p:cNvSpPr txBox="1"/>
+          <p:nvPr/>
+        </p:nvSpPr>
+        <p:spPr>
+          <a:xfrm>
+            <a:off x="731520" y="685800"/>
+            <a:ext cx="10728655" cy="777240"/>
+          </a:xfrm>
+          <a:prstGeom prst="rect">
+            <a:avLst/>
+          </a:prstGeom>
+          <a:noFill/>
+        </p:spPr>
+        <p:txBody>
+          <a:bodyPr wrap="square" lIns="0" tIns="0" rIns="0" bIns="0">
+            <a:spAutoFit/>
+          </a:bodyPr>
+          <a:lstStyle/>
+          <a:p>
+            <a:pPr>
+              <a:defRPr sz="2100" b="1">
+                <a:solidFill>
+                  <a:srgbClr val="1B1F2A"/>
+                </a:solidFill>
+                <a:latin typeface="Montserrat"/>
+              </a:defRPr>
+            </a:pPr>
+            <a:r>
+              <a:t>Tu Activación: Diagnóstico de Claridad Modo Líder</a:t>
+            </a:r>
+          </a:p>
+        </p:txBody>
+      </p:sp>
+      <p:sp>
+        <p:nvSpPr>
+          <p:cNvPr id="5" name="Rounded Rectangle 4"/>
+          <p:cNvSpPr/>
+          <p:nvPr/>
+        </p:nvSpPr>
+        <p:spPr>
+          <a:xfrm>
+            <a:off x="731520" y="1554480"/>
+            <a:ext cx="5212080" cy="4663440"/>
+          </a:xfrm>
+          <a:prstGeom prst="roundRect">
+            <a:avLst/>
+          </a:prstGeom>
+          <a:solidFill>
+            <a:srgbClr val="FFFFFF"/>
+          </a:solidFill>
+          <a:ln w="12700">
+            <a:solidFill>
+              <a:srgbClr val="E2E6EE"/>
+            </a:solidFill>
+          </a:ln>
+        </p:spPr>
+        <p:style>
+          <a:lnRef idx="1">
+            <a:schemeClr val="accent1"/>
+          </a:lnRef>
+          <a:fillRef idx="3">
+            <a:schemeClr val="accent1"/>
+          </a:fillRef>
+          <a:effectRef idx="2">
+            <a:schemeClr val="accent1"/>
+          </a:effectRef>
+          <a:fontRef idx="minor">
+            <a:schemeClr val="lt1"/>
+          </a:fontRef>
+        </p:style>
+        <p:txBody>
+          <a:bodyPr rtlCol="0" anchor="ctr"/>
+          <a:lstStyle/>
+          <a:p>
+            <a:pPr algn="ctr"/>
+          </a:p>
+        </p:txBody>
+      </p:sp>
+      <p:sp>
+        <p:nvSpPr>
+          <p:cNvPr id="6" name="TextBox 5"/>
+          <p:cNvSpPr txBox="1"/>
+          <p:nvPr/>
+        </p:nvSpPr>
+        <p:spPr>
+          <a:xfrm>
+            <a:off x="1005840" y="1737360"/>
+            <a:ext cx="4663440" cy="4297680"/>
+          </a:xfrm>
+          <a:prstGeom prst="rect">
+            <a:avLst/>
+          </a:prstGeom>
+          <a:noFill/>
+        </p:spPr>
+        <p:txBody>
+          <a:bodyPr wrap="square">
+            <a:spAutoFit/>
+          </a:bodyPr>
+          <a:lstStyle/>
+          <a:p>
+            <a:pPr>
+              <a:defRPr sz="1200" b="1">
+                <a:solidFill>
+                  <a:srgbClr val="1B1F2A"/>
+                </a:solidFill>
+                <a:latin typeface="Montserrat"/>
+              </a:defRPr>
+            </a:pPr>
+            <a:r>
+              <a:t>PARTE 1: AUTOEVALUACIÓN DE LOS 7 PILARES</a:t>
+            </a:r>
+          </a:p>
+          <a:p>
+            <a:pPr>
+              <a:spcBef>
+                <a:spcPts val="800"/>
+              </a:spcBef>
+              <a:defRPr sz="1150">
+                <a:solidFill>
+                  <a:srgbClr val="1B1F2A"/>
+                </a:solidFill>
+                <a:latin typeface="Montserrat"/>
+              </a:defRPr>
+            </a:pPr>
+            <a:r>
+              <a:t>Califica del 1 al 10 en tu Workbook:</a:t>
+            </a:r>
+            <a:br/>
+            <a:br/>
+            <a:r>
+              <a:t>1. Claridad de rumbo y propuesta de valor.</a:t>
+            </a:r>
+            <a:br/>
+            <a:r>
+              <a:t>2. Autoliderazgo y dominio emocional.</a:t>
+            </a:r>
+            <a:br/>
+            <a:r>
+              <a:t>3. Control de números y rentabilidad.</a:t>
+            </a:r>
+            <a:br/>
+            <a:r>
+              <a:t>4. Comunicación y ventas basadas en valor.</a:t>
+            </a:r>
+            <a:br/>
+            <a:r>
+              <a:t>5. Decisión y agilidad de ejecución.</a:t>
+            </a:r>
+            <a:br/>
+            <a:r>
+              <a:t>6. Procesos e indicadores de crecimiento.</a:t>
+            </a:r>
+            <a:br/>
+            <a:r>
+              <a:t>7. Firmeza de límites y liderazgo responsable.</a:t>
+            </a:r>
+          </a:p>
+        </p:txBody>
+      </p:sp>
+      <p:sp>
+        <p:nvSpPr>
+          <p:cNvPr id="7" name="Rounded Rectangle 6"/>
+          <p:cNvSpPr/>
+          <p:nvPr/>
+        </p:nvSpPr>
+        <p:spPr>
+          <a:xfrm>
+            <a:off x="6217920" y="1554480"/>
+            <a:ext cx="5212080" cy="4663440"/>
+          </a:xfrm>
+          <a:prstGeom prst="roundRect">
+            <a:avLst/>
+          </a:prstGeom>
+          <a:solidFill>
+            <a:srgbClr val="FEF9EB"/>
+          </a:solidFill>
+          <a:ln w="12700">
+            <a:solidFill>
+              <a:srgbClr val="D4AF37"/>
+            </a:solidFill>
+          </a:ln>
+        </p:spPr>
+        <p:style>
+          <a:lnRef idx="1">
+            <a:schemeClr val="accent1"/>
+          </a:lnRef>
+          <a:fillRef idx="3">
+            <a:schemeClr val="accent1"/>
+          </a:fillRef>
+          <a:effectRef idx="2">
+            <a:schemeClr val="accent1"/>
+          </a:effectRef>
+          <a:fontRef idx="minor">
+            <a:schemeClr val="lt1"/>
+          </a:fontRef>
+        </p:style>
+        <p:txBody>
+          <a:bodyPr rtlCol="0" anchor="ctr"/>
+          <a:lstStyle/>
+          <a:p>
+            <a:pPr algn="ctr"/>
+          </a:p>
+        </p:txBody>
+      </p:sp>
+      <p:sp>
+        <p:nvSpPr>
+          <p:cNvPr id="8" name="TextBox 7"/>
+          <p:cNvSpPr txBox="1"/>
+          <p:nvPr/>
+        </p:nvSpPr>
+        <p:spPr>
+          <a:xfrm>
+            <a:off x="6492240" y="1737360"/>
+            <a:ext cx="4663440" cy="4297680"/>
+          </a:xfrm>
+          <a:prstGeom prst="rect">
+            <a:avLst/>
+          </a:prstGeom>
+          <a:noFill/>
+        </p:spPr>
+        <p:txBody>
+          <a:bodyPr wrap="square">
+            <a:spAutoFit/>
+          </a:bodyPr>
+          <a:lstStyle/>
+          <a:p>
+            <a:pPr>
+              <a:defRPr sz="1200" b="1">
+                <a:solidFill>
+                  <a:srgbClr val="B4871E"/>
+                </a:solidFill>
+                <a:latin typeface="Montserrat"/>
+              </a:defRPr>
+            </a:pPr>
+            <a:r>
+              <a:t>PARTE 2: DEFINICIÓN DE LÍMITES Y DIRECCIÓN</a:t>
+            </a:r>
+          </a:p>
+          <a:p>
+            <a:pPr>
+              <a:spcBef>
+                <a:spcPts val="1000"/>
+              </a:spcBef>
+              <a:defRPr sz="1200">
+                <a:solidFill>
+                  <a:srgbClr val="1B1F2A"/>
+                </a:solidFill>
+                <a:latin typeface="Montserrat"/>
+              </a:defRPr>
+            </a:pPr>
+            <a:r>
+              <a:t>Responde en tu cuaderno de trabajo:</a:t>
+            </a:r>
+            <a:br/>
+            <a:br/>
+            <a:r>
+              <a:t>✍️ ¿Cuáles son los 3 'SÍ' fundamentales de tu negocio hoy?</a:t>
+            </a:r>
+            <a:br/>
+            <a:br/>
+            <a:r>
+              <a:t>🚫 ¿Cuáles son los 3 'NO' innegociables que debes empezar a sostener de inmediato (clientes, precios, tiempo)?</a:t>
+            </a:r>
+            <a:br/>
+            <a:br/>
+            <a:r>
+              <a:t>🎯 ¿Cuál es el pilar que más necesitas fortalecer este mes?</a:t>
             </a:r>
           </a:p>
         </p:txBody>
@@ -3509,7 +5222,7 @@
           <a:lstStyle/>
           <a:p>
             <a:pPr>
-              <a:defRPr sz="1050" b="1">
+              <a:defRPr sz="1000" b="1">
                 <a:solidFill>
                   <a:srgbClr val="B4871E"/>
                 </a:solidFill>
@@ -3517,7 +5230,7 @@
               </a:defRPr>
             </a:pPr>
             <a:r>
-              <a:t>LA DIFERENCIA CLAVE PODRÍA SER:</a:t>
+              <a:t>FUNDAMENTOS • MODO LÍDER</a:t>
             </a:r>
           </a:p>
         </p:txBody>
@@ -3553,7 +5266,7 @@
               </a:defRPr>
             </a:pPr>
             <a:r>
-              <a:t>¿Qué diferencia a un emprendedor consciente de otro que no lo es?</a:t>
+              <a:t>¿Qué significa realmente ser un Empresario Consciente?</a:t>
             </a:r>
           </a:p>
         </p:txBody>
@@ -3566,8 +5279,8 @@
         </p:nvSpPr>
         <p:spPr>
           <a:xfrm>
-            <a:off x="731520" y="1600200"/>
-            <a:ext cx="5120640" cy="4572000"/>
+            <a:off x="731520" y="1554480"/>
+            <a:ext cx="5120640" cy="4663440"/>
           </a:xfrm>
           <a:prstGeom prst="roundRect">
             <a:avLst/>
@@ -3575,9 +5288,9 @@
           <a:solidFill>
             <a:srgbClr val="FFFFFF"/>
           </a:solidFill>
-          <a:ln>
+          <a:ln w="12700">
             <a:solidFill>
-              <a:srgbClr val="E94560"/>
+              <a:srgbClr val="E2E6EE"/>
             </a:solidFill>
           </a:ln>
         </p:spPr>
@@ -3596,11 +5309,37 @@
           </a:fontRef>
         </p:style>
         <p:txBody>
-          <a:bodyPr rtlCol="0" anchor="ctr" wrap="square" tIns="274320" lIns="320040" rIns="320040"/>
-          <a:lstStyle/>
-          <a:p>
-            <a:pPr algn="ctr">
-              <a:defRPr sz="1300" b="1">
+          <a:bodyPr rtlCol="0" anchor="ctr"/>
+          <a:lstStyle/>
+          <a:p>
+            <a:pPr algn="ctr"/>
+          </a:p>
+        </p:txBody>
+      </p:sp>
+      <p:sp>
+        <p:nvSpPr>
+          <p:cNvPr id="6" name="TextBox 5"/>
+          <p:cNvSpPr txBox="1"/>
+          <p:nvPr/>
+        </p:nvSpPr>
+        <p:spPr>
+          <a:xfrm>
+            <a:off x="1005840" y="1737360"/>
+            <a:ext cx="4572000" cy="4297680"/>
+          </a:xfrm>
+          <a:prstGeom prst="rect">
+            <a:avLst/>
+          </a:prstGeom>
+          <a:noFill/>
+        </p:spPr>
+        <p:txBody>
+          <a:bodyPr wrap="square">
+            <a:spAutoFit/>
+          </a:bodyPr>
+          <a:lstStyle/>
+          <a:p>
+            <a:pPr>
+              <a:defRPr sz="1200" b="1">
                 <a:solidFill>
                   <a:srgbClr val="E94560"/>
                 </a:solidFill>
@@ -3608,43 +5347,61 @@
               </a:defRPr>
             </a:pPr>
             <a:r>
-              <a:t>Un emprendedor no consciente pregunta:</a:t>
+              <a:t>LO QUE MUCHOS CREEN</a:t>
+            </a:r>
+          </a:p>
+          <a:p>
+            <a:pPr>
+              <a:spcBef>
+                <a:spcPts val="1200"/>
+              </a:spcBef>
+              <a:defRPr sz="1300">
+                <a:solidFill>
+                  <a:srgbClr val="1B1F2A"/>
+                </a:solidFill>
+                <a:latin typeface="Montserrat"/>
+              </a:defRPr>
+            </a:pPr>
+            <a:r>
+              <a:t>• Creer que ser consciente es solo 'trabajar la mente' o meditar.</a:t>
             </a:r>
             <a:br/>
-          </a:p>
-          <a:p>
-            <a:pPr>
-              <a:defRPr sz="1500" b="1">
-                <a:solidFill>
-                  <a:srgbClr val="1B1F2A"/>
-                </a:solidFill>
-                <a:latin typeface="Montserrat"/>
-              </a:defRPr>
-            </a:pPr>
-            <a:r>
-              <a:t>“¿Cómo logro que mi negocio funcione?”</a:t>
-            </a:r>
-          </a:p>
-        </p:txBody>
-      </p:sp>
-      <p:sp>
-        <p:nvSpPr>
-          <p:cNvPr id="6" name="Rounded Rectangle 5"/>
+            <a:r>
+              <a:t>• Pensar que el propósito está reñido con ganar dinero.</a:t>
+            </a:r>
+            <a:br/>
+            <a:r>
+              <a:t>• Gestionar por intuición o urgencias cotidianas.</a:t>
+            </a:r>
+            <a:br/>
+            <a:r>
+              <a:t>• Sentir culpa por cobrar bien o decir que no a clientes.</a:t>
+            </a:r>
+            <a:br/>
+            <a:r>
+              <a:t>• Caer en la reflexión permanente sin ejecutar.</a:t>
+            </a:r>
+          </a:p>
+        </p:txBody>
+      </p:sp>
+      <p:sp>
+        <p:nvSpPr>
+          <p:cNvPr id="7" name="Rounded Rectangle 6"/>
           <p:cNvSpPr/>
           <p:nvPr/>
         </p:nvSpPr>
         <p:spPr>
           <a:xfrm>
-            <a:off x="6217920" y="1600200"/>
-            <a:ext cx="5242255" cy="4572000"/>
+            <a:off x="6217920" y="1554480"/>
+            <a:ext cx="5212080" cy="4663440"/>
           </a:xfrm>
           <a:prstGeom prst="roundRect">
             <a:avLst/>
           </a:prstGeom>
           <a:solidFill>
-            <a:srgbClr val="FFFFFF"/>
+            <a:srgbClr val="FEF9EB"/>
           </a:solidFill>
-          <a:ln>
+          <a:ln w="12700">
             <a:solidFill>
               <a:srgbClr val="D4AF37"/>
             </a:solidFill>
@@ -3665,11 +5422,37 @@
           </a:fontRef>
         </p:style>
         <p:txBody>
-          <a:bodyPr rtlCol="0" anchor="ctr" wrap="square" tIns="274320" lIns="320040" rIns="320040"/>
-          <a:lstStyle/>
-          <a:p>
-            <a:pPr algn="ctr">
-              <a:defRPr sz="1300" b="1">
+          <a:bodyPr rtlCol="0" anchor="ctr"/>
+          <a:lstStyle/>
+          <a:p>
+            <a:pPr algn="ctr"/>
+          </a:p>
+        </p:txBody>
+      </p:sp>
+      <p:sp>
+        <p:nvSpPr>
+          <p:cNvPr id="8" name="TextBox 7"/>
+          <p:cNvSpPr txBox="1"/>
+          <p:nvPr/>
+        </p:nvSpPr>
+        <p:spPr>
+          <a:xfrm>
+            <a:off x="6492240" y="1737360"/>
+            <a:ext cx="4663440" cy="4297680"/>
+          </a:xfrm>
+          <a:prstGeom prst="rect">
+            <a:avLst/>
+          </a:prstGeom>
+          <a:noFill/>
+        </p:spPr>
+        <p:txBody>
+          <a:bodyPr wrap="square">
+            <a:spAutoFit/>
+          </a:bodyPr>
+          <a:lstStyle/>
+          <a:p>
+            <a:pPr>
+              <a:defRPr sz="1200" b="1">
                 <a:solidFill>
                   <a:srgbClr val="B4871E"/>
                 </a:solidFill>
@@ -3677,35 +5460,44 @@
               </a:defRPr>
             </a:pPr>
             <a:r>
-              <a:t>Un emprendedor consciente pregunta:</a:t>
+              <a:t>LA VERDAD DEL EMPRESARIO CONSCIENTE</a:t>
+            </a:r>
+          </a:p>
+          <a:p>
+            <a:pPr>
+              <a:spcBef>
+                <a:spcPts val="1000"/>
+              </a:spcBef>
+              <a:defRPr sz="1300">
+                <a:solidFill>
+                  <a:srgbClr val="1B1F2A"/>
+                </a:solidFill>
+                <a:latin typeface="Montserrat"/>
+              </a:defRPr>
+            </a:pPr>
+            <a:r>
+              <a:t>Ser consciente es liderar un negocio desde:</a:t>
             </a:r>
             <a:br/>
-          </a:p>
-          <a:p>
-            <a:pPr>
-              <a:defRPr sz="1400" b="1">
-                <a:solidFill>
-                  <a:srgbClr val="1B1F2A"/>
-                </a:solidFill>
-                <a:latin typeface="Montserrat"/>
-              </a:defRPr>
-            </a:pPr>
-            <a:r>
-              <a:t>“¿Qué negocio quiero construir y en quién me quiero convertir mientras lo construyo?”</a:t>
-            </a:r>
-          </a:p>
-          <a:p>
             <a:br/>
-            <a:pPr>
-              <a:defRPr sz="1100">
-                <a:solidFill>
-                  <a:srgbClr val="1B1F2A"/>
-                </a:solidFill>
-                <a:latin typeface="Montserrat"/>
-              </a:defRPr>
-            </a:pPr>
-            <a:r>
-              <a:t>y luego se pregunta otras cosas, como con qué estilo de clientes me gustaría trabajar . ¿Cómo logro comunicarme con ellos? ¿Cómo conecto con sus intereses para crear conexión real? Para luego pensar, ¿qué cosas les gustan y les disgustan a mis clientes objetivos? ¿Qué odian, qué temen, que necesitan y de cuáles de sus necesidades voy a ocuparme de resolver?</a:t>
+            <a:r>
+              <a:t>🧭 1. Claridad absoluta sobre qué construyes y para qué.</a:t>
+            </a:r>
+            <a:br/>
+            <a:r>
+              <a:t>💰 2. Números reales, rentabilidad y flujo financiero.</a:t>
+            </a:r>
+            <a:br/>
+            <a:r>
+              <a:t>🎯 3. Ventas y comunicación basada en valor genuino.</a:t>
+            </a:r>
+            <a:br/>
+            <a:r>
+              <a:t>⚙️ 4. Estrategia y ejecución disciplinada.</a:t>
+            </a:r>
+            <a:br/>
+            <a:r>
+              <a:t>🤝 5. Liderazgo responsable con límites firmes.</a:t>
             </a:r>
           </a:p>
         </p:txBody>
@@ -3743,7 +5535,7 @@
             <a:avLst/>
           </a:prstGeom>
           <a:solidFill>
-            <a:srgbClr val="F8F9FB"/>
+            <a:srgbClr val="0E121B"/>
           </a:solidFill>
           <a:ln>
             <a:noFill/>
@@ -3794,15 +5586,15 @@
           <a:lstStyle/>
           <a:p>
             <a:pPr>
-              <a:defRPr sz="1050" b="1">
-                <a:solidFill>
-                  <a:srgbClr val="B4871E"/>
-                </a:solidFill>
-                <a:latin typeface="Montserrat"/>
-              </a:defRPr>
-            </a:pPr>
-            <a:r>
-              <a:t>CAPÍTULO 1 • EMPRENDER CONSCIENTEMENTE</a:t>
+              <a:defRPr sz="1000" b="1">
+                <a:solidFill>
+                  <a:srgbClr val="D4AF37"/>
+                </a:solidFill>
+                <a:latin typeface="Montserrat"/>
+              </a:defRPr>
+            </a:pPr>
+            <a:r>
+              <a:t>MAPA ESTRATÉGICO • MODO LÍDER</a:t>
             </a:r>
           </a:p>
         </p:txBody>
@@ -3832,13 +5624,13 @@
             <a:pPr>
               <a:defRPr sz="2100" b="1">
                 <a:solidFill>
-                  <a:srgbClr val="1B1F2A"/>
-                </a:solidFill>
-                <a:latin typeface="Montserrat"/>
-              </a:defRPr>
-            </a:pPr>
-            <a:r>
-              <a:t>🌱 La diferencia no está en el negocio, sino en la manera de pensar y de emprender tu negocio</a:t>
+                  <a:srgbClr val="F5F5F7"/>
+                </a:solidFill>
+                <a:latin typeface="Montserrat"/>
+              </a:defRPr>
+            </a:pPr>
+            <a:r>
+              <a:t>Los 7 Pilares del Empresario Consciente</a:t>
             </a:r>
           </a:p>
         </p:txBody>
@@ -3852,17 +5644,17 @@
         <p:spPr>
           <a:xfrm>
             <a:off x="731520" y="1645920"/>
-            <a:ext cx="10728655" cy="1371600"/>
+            <a:ext cx="2560320" cy="2011680"/>
           </a:xfrm>
           <a:prstGeom prst="roundRect">
             <a:avLst/>
           </a:prstGeom>
           <a:solidFill>
-            <a:srgbClr val="FFFFFF"/>
+            <a:srgbClr val="161A25"/>
           </a:solidFill>
-          <a:ln>
+          <a:ln w="12700">
             <a:solidFill>
-              <a:srgbClr val="E2E6EE"/>
+              <a:srgbClr val="D4AF37"/>
             </a:solidFill>
           </a:ln>
         </p:spPr>
@@ -3881,43 +5673,85 @@
           </a:fontRef>
         </p:style>
         <p:txBody>
-          <a:bodyPr rtlCol="0" anchor="ctr" wrap="square" lIns="365760" rIns="365760"/>
-          <a:lstStyle/>
-          <a:p>
-            <a:pPr algn="ctr">
-              <a:defRPr sz="1300" b="1">
-                <a:solidFill>
-                  <a:srgbClr val="B4871E"/>
-                </a:solidFill>
-                <a:latin typeface="Montserrat"/>
-              </a:defRPr>
-            </a:pPr>
-            <a:r>
-              <a:t>Un emprendedor consciente también quiere ganar dinero, crecer, vender y tener éxito. No renuncia a la ambición.</a:t>
-            </a:r>
-          </a:p>
-        </p:txBody>
-      </p:sp>
-      <p:sp>
-        <p:nvSpPr>
-          <p:cNvPr id="6" name="Rounded Rectangle 5"/>
+          <a:bodyPr rtlCol="0" anchor="ctr"/>
+          <a:lstStyle/>
+          <a:p>
+            <a:pPr algn="ctr"/>
+          </a:p>
+        </p:txBody>
+      </p:sp>
+      <p:sp>
+        <p:nvSpPr>
+          <p:cNvPr id="6" name="TextBox 5"/>
+          <p:cNvSpPr txBox="1"/>
+          <p:nvPr/>
+        </p:nvSpPr>
+        <p:spPr>
+          <a:xfrm>
+            <a:off x="868680" y="1783080"/>
+            <a:ext cx="2286000" cy="1737360"/>
+          </a:xfrm>
+          <a:prstGeom prst="rect">
+            <a:avLst/>
+          </a:prstGeom>
+          <a:noFill/>
+        </p:spPr>
+        <p:txBody>
+          <a:bodyPr wrap="square">
+            <a:spAutoFit/>
+          </a:bodyPr>
+          <a:lstStyle/>
+          <a:p>
+            <a:pPr>
+              <a:defRPr sz="1200" b="1">
+                <a:solidFill>
+                  <a:srgbClr val="D4AF37"/>
+                </a:solidFill>
+                <a:latin typeface="Montserrat"/>
+              </a:defRPr>
+            </a:pPr>
+            <a:r>
+              <a:t>1. Gestiona desde la Claridad</a:t>
+            </a:r>
+          </a:p>
+          <a:p>
+            <a:pPr>
+              <a:spcBef>
+                <a:spcPts val="600"/>
+              </a:spcBef>
+              <a:defRPr sz="1050">
+                <a:solidFill>
+                  <a:srgbClr val="AAB4C3"/>
+                </a:solidFill>
+                <a:latin typeface="Montserrat"/>
+              </a:defRPr>
+            </a:pPr>
+            <a:r>
+              <a:t>Punto de partida: rumbo, límites y decisiones alineadas.</a:t>
+            </a:r>
+          </a:p>
+        </p:txBody>
+      </p:sp>
+      <p:sp>
+        <p:nvSpPr>
+          <p:cNvPr id="7" name="Rounded Rectangle 6"/>
           <p:cNvSpPr/>
           <p:nvPr/>
         </p:nvSpPr>
         <p:spPr>
           <a:xfrm>
-            <a:off x="731520" y="3200400"/>
-            <a:ext cx="10728655" cy="1371600"/>
+            <a:off x="3429000" y="1645920"/>
+            <a:ext cx="2560320" cy="2011680"/>
           </a:xfrm>
           <a:prstGeom prst="roundRect">
             <a:avLst/>
           </a:prstGeom>
           <a:solidFill>
-            <a:srgbClr val="FFFFFF"/>
+            <a:srgbClr val="161A25"/>
           </a:solidFill>
-          <a:ln>
+          <a:ln w="12700">
             <a:solidFill>
-              <a:srgbClr val="E2E6EE"/>
+              <a:srgbClr val="283246"/>
             </a:solidFill>
           </a:ln>
         </p:spPr>
@@ -3936,43 +5770,85 @@
           </a:fontRef>
         </p:style>
         <p:txBody>
-          <a:bodyPr rtlCol="0" anchor="ctr" wrap="square" lIns="365760" rIns="365760"/>
-          <a:lstStyle/>
-          <a:p>
-            <a:pPr algn="ctr">
-              <a:defRPr sz="1300" b="1">
-                <a:solidFill>
-                  <a:srgbClr val="1B1F2A"/>
-                </a:solidFill>
-                <a:latin typeface="Montserrat"/>
-              </a:defRPr>
-            </a:pPr>
-            <a:r>
-              <a:t>La diferencia es que no separa el éxito económico del impacto que genera, de sus valores y de la persona que está siendo.</a:t>
-            </a:r>
-          </a:p>
-        </p:txBody>
-      </p:sp>
-      <p:sp>
-        <p:nvSpPr>
-          <p:cNvPr id="7" name="Rounded Rectangle 6"/>
+          <a:bodyPr rtlCol="0" anchor="ctr"/>
+          <a:lstStyle/>
+          <a:p>
+            <a:pPr algn="ctr"/>
+          </a:p>
+        </p:txBody>
+      </p:sp>
+      <p:sp>
+        <p:nvSpPr>
+          <p:cNvPr id="8" name="TextBox 7"/>
+          <p:cNvSpPr txBox="1"/>
+          <p:nvPr/>
+        </p:nvSpPr>
+        <p:spPr>
+          <a:xfrm>
+            <a:off x="3566160" y="1783080"/>
+            <a:ext cx="2286000" cy="1737360"/>
+          </a:xfrm>
+          <a:prstGeom prst="rect">
+            <a:avLst/>
+          </a:prstGeom>
+          <a:noFill/>
+        </p:spPr>
+        <p:txBody>
+          <a:bodyPr wrap="square">
+            <a:spAutoFit/>
+          </a:bodyPr>
+          <a:lstStyle/>
+          <a:p>
+            <a:pPr>
+              <a:defRPr sz="1200" b="1">
+                <a:solidFill>
+                  <a:srgbClr val="F5F5F7"/>
+                </a:solidFill>
+                <a:latin typeface="Montserrat"/>
+              </a:defRPr>
+            </a:pPr>
+            <a:r>
+              <a:t>2. Se Conoce y se Autolidera</a:t>
+            </a:r>
+          </a:p>
+          <a:p>
+            <a:pPr>
+              <a:spcBef>
+                <a:spcPts val="600"/>
+              </a:spcBef>
+              <a:defRPr sz="1050">
+                <a:solidFill>
+                  <a:srgbClr val="AAB4C3"/>
+                </a:solidFill>
+                <a:latin typeface="Montserrat"/>
+              </a:defRPr>
+            </a:pPr>
+            <a:r>
+              <a:t>El negocio es un reflejo de quien lo lidera.</a:t>
+            </a:r>
+          </a:p>
+        </p:txBody>
+      </p:sp>
+      <p:sp>
+        <p:nvSpPr>
+          <p:cNvPr id="9" name="Rounded Rectangle 8"/>
           <p:cNvSpPr/>
           <p:nvPr/>
         </p:nvSpPr>
         <p:spPr>
           <a:xfrm>
-            <a:off x="731520" y="4754880"/>
-            <a:ext cx="10728655" cy="1554480"/>
+            <a:off x="6126480" y="1645920"/>
+            <a:ext cx="2560320" cy="2011680"/>
           </a:xfrm>
           <a:prstGeom prst="roundRect">
             <a:avLst/>
           </a:prstGeom>
           <a:solidFill>
-            <a:srgbClr val="FFFFFF"/>
+            <a:srgbClr val="161A25"/>
           </a:solidFill>
-          <a:ln>
+          <a:ln w="12700">
             <a:solidFill>
-              <a:srgbClr val="E2E6EE"/>
+              <a:srgbClr val="283246"/>
             </a:solidFill>
           </a:ln>
         </p:spPr>
@@ -3991,19 +5867,449 @@
           </a:fontRef>
         </p:style>
         <p:txBody>
-          <a:bodyPr rtlCol="0" anchor="ctr" wrap="square" lIns="365760" rIns="365760"/>
-          <a:lstStyle/>
-          <a:p>
-            <a:pPr algn="ctr">
-              <a:defRPr sz="1200">
-                <a:solidFill>
-                  <a:srgbClr val="1B1F2A"/>
-                </a:solidFill>
-                <a:latin typeface="Montserrat"/>
-              </a:defRPr>
-            </a:pPr>
-            <a:r>
-              <a:t>Por otro lado un emprendedor consciente sabe que para poder lograr lo que desea necesariamente necesita trascender sus miedos, desactivar sus limitaciones mentales y/o reconocer y resolver las heridas que bloquean su camino y limitaciones hacia su éxito.</a:t>
+          <a:bodyPr rtlCol="0" anchor="ctr"/>
+          <a:lstStyle/>
+          <a:p>
+            <a:pPr algn="ctr"/>
+          </a:p>
+        </p:txBody>
+      </p:sp>
+      <p:sp>
+        <p:nvSpPr>
+          <p:cNvPr id="10" name="TextBox 9"/>
+          <p:cNvSpPr txBox="1"/>
+          <p:nvPr/>
+        </p:nvSpPr>
+        <p:spPr>
+          <a:xfrm>
+            <a:off x="6263640" y="1783080"/>
+            <a:ext cx="2286000" cy="1737360"/>
+          </a:xfrm>
+          <a:prstGeom prst="rect">
+            <a:avLst/>
+          </a:prstGeom>
+          <a:noFill/>
+        </p:spPr>
+        <p:txBody>
+          <a:bodyPr wrap="square">
+            <a:spAutoFit/>
+          </a:bodyPr>
+          <a:lstStyle/>
+          <a:p>
+            <a:pPr>
+              <a:defRPr sz="1200" b="1">
+                <a:solidFill>
+                  <a:srgbClr val="F5F5F7"/>
+                </a:solidFill>
+                <a:latin typeface="Montserrat"/>
+              </a:defRPr>
+            </a:pPr>
+            <a:r>
+              <a:t>3. Entiende el Dinero</a:t>
+            </a:r>
+          </a:p>
+          <a:p>
+            <a:pPr>
+              <a:spcBef>
+                <a:spcPts val="600"/>
+              </a:spcBef>
+              <a:defRPr sz="1050">
+                <a:solidFill>
+                  <a:srgbClr val="AAB4C3"/>
+                </a:solidFill>
+                <a:latin typeface="Montserrat"/>
+              </a:defRPr>
+            </a:pPr>
+            <a:r>
+              <a:t>Cero miedo y cero romanticismo: números y rentabilidad.</a:t>
+            </a:r>
+          </a:p>
+        </p:txBody>
+      </p:sp>
+      <p:sp>
+        <p:nvSpPr>
+          <p:cNvPr id="11" name="Rounded Rectangle 10"/>
+          <p:cNvSpPr/>
+          <p:nvPr/>
+        </p:nvSpPr>
+        <p:spPr>
+          <a:xfrm>
+            <a:off x="8823960" y="1645920"/>
+            <a:ext cx="2560320" cy="2011680"/>
+          </a:xfrm>
+          <a:prstGeom prst="roundRect">
+            <a:avLst/>
+          </a:prstGeom>
+          <a:solidFill>
+            <a:srgbClr val="161A25"/>
+          </a:solidFill>
+          <a:ln w="12700">
+            <a:solidFill>
+              <a:srgbClr val="283246"/>
+            </a:solidFill>
+          </a:ln>
+        </p:spPr>
+        <p:style>
+          <a:lnRef idx="1">
+            <a:schemeClr val="accent1"/>
+          </a:lnRef>
+          <a:fillRef idx="3">
+            <a:schemeClr val="accent1"/>
+          </a:fillRef>
+          <a:effectRef idx="2">
+            <a:schemeClr val="accent1"/>
+          </a:effectRef>
+          <a:fontRef idx="minor">
+            <a:schemeClr val="lt1"/>
+          </a:fontRef>
+        </p:style>
+        <p:txBody>
+          <a:bodyPr rtlCol="0" anchor="ctr"/>
+          <a:lstStyle/>
+          <a:p>
+            <a:pPr algn="ctr"/>
+          </a:p>
+        </p:txBody>
+      </p:sp>
+      <p:sp>
+        <p:nvSpPr>
+          <p:cNvPr id="12" name="TextBox 11"/>
+          <p:cNvSpPr txBox="1"/>
+          <p:nvPr/>
+        </p:nvSpPr>
+        <p:spPr>
+          <a:xfrm>
+            <a:off x="8961120" y="1783080"/>
+            <a:ext cx="2286000" cy="1737360"/>
+          </a:xfrm>
+          <a:prstGeom prst="rect">
+            <a:avLst/>
+          </a:prstGeom>
+          <a:noFill/>
+        </p:spPr>
+        <p:txBody>
+          <a:bodyPr wrap="square">
+            <a:spAutoFit/>
+          </a:bodyPr>
+          <a:lstStyle/>
+          <a:p>
+            <a:pPr>
+              <a:defRPr sz="1200" b="1">
+                <a:solidFill>
+                  <a:srgbClr val="F5F5F7"/>
+                </a:solidFill>
+                <a:latin typeface="Montserrat"/>
+              </a:defRPr>
+            </a:pPr>
+            <a:r>
+              <a:t>4. Vende y Comunica con Valor</a:t>
+            </a:r>
+          </a:p>
+          <a:p>
+            <a:pPr>
+              <a:spcBef>
+                <a:spcPts val="600"/>
+              </a:spcBef>
+              <a:defRPr sz="1050">
+                <a:solidFill>
+                  <a:srgbClr val="AAB4C3"/>
+                </a:solidFill>
+                <a:latin typeface="Montserrat"/>
+              </a:defRPr>
+            </a:pPr>
+            <a:r>
+              <a:t>Vender no es perseguir, es conectar y servir.</a:t>
+            </a:r>
+          </a:p>
+        </p:txBody>
+      </p:sp>
+      <p:sp>
+        <p:nvSpPr>
+          <p:cNvPr id="13" name="Rounded Rectangle 12"/>
+          <p:cNvSpPr/>
+          <p:nvPr/>
+        </p:nvSpPr>
+        <p:spPr>
+          <a:xfrm>
+            <a:off x="1371600" y="3931920"/>
+            <a:ext cx="3017520" cy="2011680"/>
+          </a:xfrm>
+          <a:prstGeom prst="roundRect">
+            <a:avLst/>
+          </a:prstGeom>
+          <a:solidFill>
+            <a:srgbClr val="161A25"/>
+          </a:solidFill>
+          <a:ln w="12700">
+            <a:solidFill>
+              <a:srgbClr val="283246"/>
+            </a:solidFill>
+          </a:ln>
+        </p:spPr>
+        <p:style>
+          <a:lnRef idx="1">
+            <a:schemeClr val="accent1"/>
+          </a:lnRef>
+          <a:fillRef idx="3">
+            <a:schemeClr val="accent1"/>
+          </a:fillRef>
+          <a:effectRef idx="2">
+            <a:schemeClr val="accent1"/>
+          </a:effectRef>
+          <a:fontRef idx="minor">
+            <a:schemeClr val="lt1"/>
+          </a:fontRef>
+        </p:style>
+        <p:txBody>
+          <a:bodyPr rtlCol="0" anchor="ctr"/>
+          <a:lstStyle/>
+          <a:p>
+            <a:pPr algn="ctr"/>
+          </a:p>
+        </p:txBody>
+      </p:sp>
+      <p:sp>
+        <p:nvSpPr>
+          <p:cNvPr id="14" name="TextBox 13"/>
+          <p:cNvSpPr txBox="1"/>
+          <p:nvPr/>
+        </p:nvSpPr>
+        <p:spPr>
+          <a:xfrm>
+            <a:off x="1508760" y="4069080"/>
+            <a:ext cx="2743200" cy="1737360"/>
+          </a:xfrm>
+          <a:prstGeom prst="rect">
+            <a:avLst/>
+          </a:prstGeom>
+          <a:noFill/>
+        </p:spPr>
+        <p:txBody>
+          <a:bodyPr wrap="square">
+            <a:spAutoFit/>
+          </a:bodyPr>
+          <a:lstStyle/>
+          <a:p>
+            <a:pPr>
+              <a:defRPr sz="1200" b="1">
+                <a:solidFill>
+                  <a:srgbClr val="F5F5F7"/>
+                </a:solidFill>
+                <a:latin typeface="Montserrat"/>
+              </a:defRPr>
+            </a:pPr>
+            <a:r>
+              <a:t>5. Decide y Ejecuta</a:t>
+            </a:r>
+          </a:p>
+          <a:p>
+            <a:pPr>
+              <a:spcBef>
+                <a:spcPts val="600"/>
+              </a:spcBef>
+              <a:defRPr sz="1050">
+                <a:solidFill>
+                  <a:srgbClr val="AAB4C3"/>
+                </a:solidFill>
+                <a:latin typeface="Montserrat"/>
+              </a:defRPr>
+            </a:pPr>
+            <a:r>
+              <a:t>Consciencia con acción ágil; salir de la parálisis.</a:t>
+            </a:r>
+          </a:p>
+        </p:txBody>
+      </p:sp>
+      <p:sp>
+        <p:nvSpPr>
+          <p:cNvPr id="15" name="Rounded Rectangle 14"/>
+          <p:cNvSpPr/>
+          <p:nvPr/>
+        </p:nvSpPr>
+        <p:spPr>
+          <a:xfrm>
+            <a:off x="4526280" y="3931920"/>
+            <a:ext cx="3017520" cy="2011680"/>
+          </a:xfrm>
+          <a:prstGeom prst="roundRect">
+            <a:avLst/>
+          </a:prstGeom>
+          <a:solidFill>
+            <a:srgbClr val="161A25"/>
+          </a:solidFill>
+          <a:ln w="12700">
+            <a:solidFill>
+              <a:srgbClr val="283246"/>
+            </a:solidFill>
+          </a:ln>
+        </p:spPr>
+        <p:style>
+          <a:lnRef idx="1">
+            <a:schemeClr val="accent1"/>
+          </a:lnRef>
+          <a:fillRef idx="3">
+            <a:schemeClr val="accent1"/>
+          </a:fillRef>
+          <a:effectRef idx="2">
+            <a:schemeClr val="accent1"/>
+          </a:effectRef>
+          <a:fontRef idx="minor">
+            <a:schemeClr val="lt1"/>
+          </a:fontRef>
+        </p:style>
+        <p:txBody>
+          <a:bodyPr rtlCol="0" anchor="ctr"/>
+          <a:lstStyle/>
+          <a:p>
+            <a:pPr algn="ctr"/>
+          </a:p>
+        </p:txBody>
+      </p:sp>
+      <p:sp>
+        <p:nvSpPr>
+          <p:cNvPr id="16" name="TextBox 15"/>
+          <p:cNvSpPr txBox="1"/>
+          <p:nvPr/>
+        </p:nvSpPr>
+        <p:spPr>
+          <a:xfrm>
+            <a:off x="4663440" y="4069080"/>
+            <a:ext cx="2743200" cy="1737360"/>
+          </a:xfrm>
+          <a:prstGeom prst="rect">
+            <a:avLst/>
+          </a:prstGeom>
+          <a:noFill/>
+        </p:spPr>
+        <p:txBody>
+          <a:bodyPr wrap="square">
+            <a:spAutoFit/>
+          </a:bodyPr>
+          <a:lstStyle/>
+          <a:p>
+            <a:pPr>
+              <a:defRPr sz="1200" b="1">
+                <a:solidFill>
+                  <a:srgbClr val="F5F5F7"/>
+                </a:solidFill>
+                <a:latin typeface="Montserrat"/>
+              </a:defRPr>
+            </a:pPr>
+            <a:r>
+              <a:t>6. Gestiona para Crecer</a:t>
+            </a:r>
+          </a:p>
+          <a:p>
+            <a:pPr>
+              <a:spcBef>
+                <a:spcPts val="600"/>
+              </a:spcBef>
+              <a:defRPr sz="1050">
+                <a:solidFill>
+                  <a:srgbClr val="AAB4C3"/>
+                </a:solidFill>
+                <a:latin typeface="Montserrat"/>
+              </a:defRPr>
+            </a:pPr>
+            <a:r>
+              <a:t>Procesos, KPIs y escala sin agotar tu energía.</a:t>
+            </a:r>
+          </a:p>
+        </p:txBody>
+      </p:sp>
+      <p:sp>
+        <p:nvSpPr>
+          <p:cNvPr id="17" name="Rounded Rectangle 16"/>
+          <p:cNvSpPr/>
+          <p:nvPr/>
+        </p:nvSpPr>
+        <p:spPr>
+          <a:xfrm>
+            <a:off x="7680960" y="3931920"/>
+            <a:ext cx="3017520" cy="2011680"/>
+          </a:xfrm>
+          <a:prstGeom prst="roundRect">
+            <a:avLst/>
+          </a:prstGeom>
+          <a:solidFill>
+            <a:srgbClr val="161A25"/>
+          </a:solidFill>
+          <a:ln w="12700">
+            <a:solidFill>
+              <a:srgbClr val="283246"/>
+            </a:solidFill>
+          </a:ln>
+        </p:spPr>
+        <p:style>
+          <a:lnRef idx="1">
+            <a:schemeClr val="accent1"/>
+          </a:lnRef>
+          <a:fillRef idx="3">
+            <a:schemeClr val="accent1"/>
+          </a:fillRef>
+          <a:effectRef idx="2">
+            <a:schemeClr val="accent1"/>
+          </a:effectRef>
+          <a:fontRef idx="minor">
+            <a:schemeClr val="lt1"/>
+          </a:fontRef>
+        </p:style>
+        <p:txBody>
+          <a:bodyPr rtlCol="0" anchor="ctr"/>
+          <a:lstStyle/>
+          <a:p>
+            <a:pPr algn="ctr"/>
+          </a:p>
+        </p:txBody>
+      </p:sp>
+      <p:sp>
+        <p:nvSpPr>
+          <p:cNvPr id="18" name="TextBox 17"/>
+          <p:cNvSpPr txBox="1"/>
+          <p:nvPr/>
+        </p:nvSpPr>
+        <p:spPr>
+          <a:xfrm>
+            <a:off x="7818120" y="4069080"/>
+            <a:ext cx="2743200" cy="1737360"/>
+          </a:xfrm>
+          <a:prstGeom prst="rect">
+            <a:avLst/>
+          </a:prstGeom>
+          <a:noFill/>
+        </p:spPr>
+        <p:txBody>
+          <a:bodyPr wrap="square">
+            <a:spAutoFit/>
+          </a:bodyPr>
+          <a:lstStyle/>
+          <a:p>
+            <a:pPr>
+              <a:defRPr sz="1200" b="1">
+                <a:solidFill>
+                  <a:srgbClr val="F5F5F7"/>
+                </a:solidFill>
+                <a:latin typeface="Montserrat"/>
+              </a:defRPr>
+            </a:pPr>
+            <a:r>
+              <a:t>7. Lidera con Responsabilidad</a:t>
+            </a:r>
+          </a:p>
+          <a:p>
+            <a:pPr>
+              <a:spcBef>
+                <a:spcPts val="600"/>
+              </a:spcBef>
+              <a:defRPr sz="1050">
+                <a:solidFill>
+                  <a:srgbClr val="AAB4C3"/>
+                </a:solidFill>
+                <a:latin typeface="Montserrat"/>
+              </a:defRPr>
+            </a:pPr>
+            <a:r>
+              <a:t>Límites claros y conversaciones difíciles.</a:t>
             </a:r>
           </a:p>
         </p:txBody>
@@ -4041,7 +6347,7 @@
             <a:avLst/>
           </a:prstGeom>
           <a:solidFill>
-            <a:srgbClr val="FEF9EB"/>
+            <a:srgbClr val="F8F9FB"/>
           </a:solidFill>
           <a:ln>
             <a:noFill/>
@@ -4071,22 +6377,94 @@
       </p:sp>
       <p:sp>
         <p:nvSpPr>
-          <p:cNvPr id="3" name="Rounded Rectangle 2"/>
+          <p:cNvPr id="3" name="TextBox 2"/>
+          <p:cNvSpPr txBox="1"/>
+          <p:nvPr/>
+        </p:nvSpPr>
+        <p:spPr>
+          <a:xfrm>
+            <a:off x="731520" y="365760"/>
+            <a:ext cx="10728655" cy="320040"/>
+          </a:xfrm>
+          <a:prstGeom prst="rect">
+            <a:avLst/>
+          </a:prstGeom>
+          <a:noFill/>
+        </p:spPr>
+        <p:txBody>
+          <a:bodyPr wrap="square" lIns="0" tIns="0" rIns="0" bIns="0">
+            <a:spAutoFit/>
+          </a:bodyPr>
+          <a:lstStyle/>
+          <a:p>
+            <a:pPr>
+              <a:defRPr sz="1000" b="1">
+                <a:solidFill>
+                  <a:srgbClr val="B4871E"/>
+                </a:solidFill>
+                <a:latin typeface="Montserrat"/>
+              </a:defRPr>
+            </a:pPr>
+            <a:r>
+              <a:t>PILAR 1 • MODO LÍDER</a:t>
+            </a:r>
+          </a:p>
+        </p:txBody>
+      </p:sp>
+      <p:sp>
+        <p:nvSpPr>
+          <p:cNvPr id="4" name="TextBox 3"/>
+          <p:cNvSpPr txBox="1"/>
+          <p:nvPr/>
+        </p:nvSpPr>
+        <p:spPr>
+          <a:xfrm>
+            <a:off x="731520" y="685800"/>
+            <a:ext cx="10728655" cy="777240"/>
+          </a:xfrm>
+          <a:prstGeom prst="rect">
+            <a:avLst/>
+          </a:prstGeom>
+          <a:noFill/>
+        </p:spPr>
+        <p:txBody>
+          <a:bodyPr wrap="square" lIns="0" tIns="0" rIns="0" bIns="0">
+            <a:spAutoFit/>
+          </a:bodyPr>
+          <a:lstStyle/>
+          <a:p>
+            <a:pPr>
+              <a:defRPr sz="2100" b="1">
+                <a:solidFill>
+                  <a:srgbClr val="1B1F2A"/>
+                </a:solidFill>
+                <a:latin typeface="Montserrat"/>
+              </a:defRPr>
+            </a:pPr>
+            <a:r>
+              <a:t>Pilar 1: Gestiona desde la Claridad (El Punto de Partida)</a:t>
+            </a:r>
+          </a:p>
+        </p:txBody>
+      </p:sp>
+      <p:sp>
+        <p:nvSpPr>
+          <p:cNvPr id="5" name="Rounded Rectangle 4"/>
           <p:cNvSpPr/>
           <p:nvPr/>
         </p:nvSpPr>
         <p:spPr>
           <a:xfrm>
-            <a:off x="1097280" y="1097280"/>
-            <a:ext cx="9997135" cy="4663440"/>
+            <a:off x="731520" y="1463040"/>
+            <a:ext cx="10728655" cy="1005840"/>
           </a:xfrm>
           <a:prstGeom prst="roundRect">
             <a:avLst/>
           </a:prstGeom>
           <a:solidFill>
-            <a:srgbClr val="FFFFFF"/>
+            <a:srgbClr val="FEF9EB"/>
           </a:solidFill>
-          <a:ln w="25400">
+          <a:ln w="12700">
             <a:solidFill>
               <a:srgbClr val="D4AF37"/>
             </a:solidFill>
@@ -4107,25 +6485,227 @@
           </a:fontRef>
         </p:style>
         <p:txBody>
-          <a:bodyPr rtlCol="0" anchor="ctr" wrap="square" tIns="1005840" lIns="731520" rIns="731520"/>
-          <a:lstStyle/>
-          <a:p>
-            <a:pPr algn="ctr">
+          <a:bodyPr rtlCol="0" anchor="ctr"/>
+          <a:lstStyle/>
+          <a:p>
+            <a:pPr algn="ctr"/>
+          </a:p>
+        </p:txBody>
+      </p:sp>
+      <p:sp>
+        <p:nvSpPr>
+          <p:cNvPr id="6" name="TextBox 5"/>
+          <p:cNvSpPr txBox="1"/>
+          <p:nvPr/>
+        </p:nvSpPr>
+        <p:spPr>
+          <a:xfrm>
+            <a:off x="1005840" y="1600200"/>
+            <a:ext cx="10149840" cy="731520"/>
+          </a:xfrm>
+          <a:prstGeom prst="rect">
+            <a:avLst/>
+          </a:prstGeom>
+          <a:noFill/>
+        </p:spPr>
+        <p:txBody>
+          <a:bodyPr wrap="none">
+            <a:spAutoFit/>
+          </a:bodyPr>
+          <a:lstStyle/>
+          <a:p>
+            <a:pPr>
+              <a:defRPr sz="1400" b="1">
+                <a:solidFill>
+                  <a:srgbClr val="B4871E"/>
+                </a:solidFill>
+                <a:latin typeface="Montserrat"/>
+              </a:defRPr>
+            </a:pPr>
+            <a:r>
+              <a:t>“Antes de hablar de dinero, ventas, estrategia o liderazgo, tiene que existir una dirección. La claridad es el punto de partida de todo.”</a:t>
+            </a:r>
+          </a:p>
+        </p:txBody>
+      </p:sp>
+      <p:sp>
+        <p:nvSpPr>
+          <p:cNvPr id="7" name="Rounded Rectangle 6"/>
+          <p:cNvSpPr/>
+          <p:nvPr/>
+        </p:nvSpPr>
+        <p:spPr>
+          <a:xfrm>
+            <a:off x="731520" y="2651760"/>
+            <a:ext cx="5212080" cy="3657600"/>
+          </a:xfrm>
+          <a:prstGeom prst="roundRect">
+            <a:avLst/>
+          </a:prstGeom>
+          <a:solidFill>
+            <a:srgbClr val="FFFFFF"/>
+          </a:solidFill>
+          <a:ln w="12700">
+            <a:solidFill>
+              <a:srgbClr val="E2E6EE"/>
+            </a:solidFill>
+          </a:ln>
+        </p:spPr>
+        <p:style>
+          <a:lnRef idx="1">
+            <a:schemeClr val="accent1"/>
+          </a:lnRef>
+          <a:fillRef idx="3">
+            <a:schemeClr val="accent1"/>
+          </a:fillRef>
+          <a:effectRef idx="2">
+            <a:schemeClr val="accent1"/>
+          </a:effectRef>
+          <a:fontRef idx="minor">
+            <a:schemeClr val="lt1"/>
+          </a:fontRef>
+        </p:style>
+        <p:txBody>
+          <a:bodyPr rtlCol="0" anchor="ctr"/>
+          <a:lstStyle/>
+          <a:p>
+            <a:pPr algn="ctr"/>
+          </a:p>
+        </p:txBody>
+      </p:sp>
+      <p:sp>
+        <p:nvSpPr>
+          <p:cNvPr id="8" name="TextBox 7"/>
+          <p:cNvSpPr txBox="1"/>
+          <p:nvPr/>
+        </p:nvSpPr>
+        <p:spPr>
+          <a:xfrm>
+            <a:off x="1005840" y="2834640"/>
+            <a:ext cx="4663440" cy="3291840"/>
+          </a:xfrm>
+          <a:prstGeom prst="rect">
+            <a:avLst/>
+          </a:prstGeom>
+          <a:noFill/>
+        </p:spPr>
+        <p:txBody>
+          <a:bodyPr wrap="square">
+            <a:spAutoFit/>
+          </a:bodyPr>
+          <a:lstStyle/>
+          <a:p>
+            <a:pPr>
               <a:defRPr sz="1200" b="1">
                 <a:solidFill>
-                  <a:srgbClr val="B4871E"/>
-                </a:solidFill>
-                <a:latin typeface="Montserrat"/>
-              </a:defRPr>
-            </a:pPr>
-            <a:r>
-              <a:t>PRINCIPIO FUNDAMENTAL</a:t>
+                  <a:srgbClr val="1B1F2A"/>
+                </a:solidFill>
+                <a:latin typeface="Montserrat"/>
+              </a:defRPr>
+            </a:pPr>
+            <a:r>
+              <a:t>¿SOBRE QUÉ DEBES TENER CLARIDAD TOTAL?</a:t>
+            </a:r>
+          </a:p>
+          <a:p>
+            <a:pPr>
+              <a:spcBef>
+                <a:spcPts val="1000"/>
+              </a:spcBef>
+              <a:defRPr sz="1250">
+                <a:solidFill>
+                  <a:srgbClr val="1B1F2A"/>
+                </a:solidFill>
+                <a:latin typeface="Montserrat"/>
+              </a:defRPr>
+            </a:pPr>
+            <a:r>
+              <a:t>🎯 Qué quieres construir y para qué.</a:t>
             </a:r>
             <a:br/>
-          </a:p>
-          <a:p>
-            <a:pPr algn="ctr">
-              <a:defRPr sz="2200" b="1">
+            <a:r>
+              <a:t>📦 Qué productos o servicios ofreces exactamente.</a:t>
+            </a:r>
+            <a:br/>
+            <a:r>
+              <a:t>👥 A qué tipo de clientes quieres atender (y a quiénes no).</a:t>
+            </a:r>
+            <a:br/>
+            <a:r>
+              <a:t>💡 Qué problema específico resuelves y qué valor aportas.</a:t>
+            </a:r>
+          </a:p>
+        </p:txBody>
+      </p:sp>
+      <p:sp>
+        <p:nvSpPr>
+          <p:cNvPr id="9" name="Rounded Rectangle 8"/>
+          <p:cNvSpPr/>
+          <p:nvPr/>
+        </p:nvSpPr>
+        <p:spPr>
+          <a:xfrm>
+            <a:off x="6217920" y="2651760"/>
+            <a:ext cx="5212080" cy="3657600"/>
+          </a:xfrm>
+          <a:prstGeom prst="roundRect">
+            <a:avLst/>
+          </a:prstGeom>
+          <a:solidFill>
+            <a:srgbClr val="FFFFFF"/>
+          </a:solidFill>
+          <a:ln w="12700">
+            <a:solidFill>
+              <a:srgbClr val="E2E6EE"/>
+            </a:solidFill>
+          </a:ln>
+        </p:spPr>
+        <p:style>
+          <a:lnRef idx="1">
+            <a:schemeClr val="accent1"/>
+          </a:lnRef>
+          <a:fillRef idx="3">
+            <a:schemeClr val="accent1"/>
+          </a:fillRef>
+          <a:effectRef idx="2">
+            <a:schemeClr val="accent1"/>
+          </a:effectRef>
+          <a:fontRef idx="minor">
+            <a:schemeClr val="lt1"/>
+          </a:fontRef>
+        </p:style>
+        <p:txBody>
+          <a:bodyPr rtlCol="0" anchor="ctr"/>
+          <a:lstStyle/>
+          <a:p>
+            <a:pPr algn="ctr"/>
+          </a:p>
+        </p:txBody>
+      </p:sp>
+      <p:sp>
+        <p:nvSpPr>
+          <p:cNvPr id="10" name="TextBox 9"/>
+          <p:cNvSpPr txBox="1"/>
+          <p:nvPr/>
+        </p:nvSpPr>
+        <p:spPr>
+          <a:xfrm>
+            <a:off x="6492240" y="2834640"/>
+            <a:ext cx="4663440" cy="3291840"/>
+          </a:xfrm>
+          <a:prstGeom prst="rect">
+            <a:avLst/>
+          </a:prstGeom>
+          <a:noFill/>
+        </p:spPr>
+        <p:txBody>
+          <a:bodyPr wrap="square">
+            <a:spAutoFit/>
+          </a:bodyPr>
+          <a:lstStyle/>
+          <a:p>
+            <a:pPr>
+              <a:defRPr sz="1200" b="1">
                 <a:solidFill>
                   <a:srgbClr val="1B1F2A"/>
                 </a:solidFill>
@@ -4133,7 +6713,35 @@
               </a:defRPr>
             </a:pPr>
             <a:r>
-              <a:t>“Ser un emprendedor consciente no significa emprender sin ambición. Significa tener ambición sin perderte a vos misma en el camino.”</a:t>
+              <a:t>¿CÓMO DECIDES HACER NEGOCIOS?</a:t>
+            </a:r>
+          </a:p>
+          <a:p>
+            <a:pPr>
+              <a:spcBef>
+                <a:spcPts val="1000"/>
+              </a:spcBef>
+              <a:defRPr sz="1250">
+                <a:solidFill>
+                  <a:srgbClr val="1B1F2A"/>
+                </a:solidFill>
+                <a:latin typeface="Montserrat"/>
+              </a:defRPr>
+            </a:pPr>
+            <a:r>
+              <a:t>⚖️ Cuáles son los valores que guían tus decisiones.</a:t>
+            </a:r>
+            <a:br/>
+            <a:r>
+              <a:t>🚫 Qué estás dispuesto a hacer y qué NO estás dispuesto a hacer.</a:t>
+            </a:r>
+            <a:br/>
+            <a:r>
+              <a:t>🛡️ Cuáles son tus límites innegociables y cuáles son tus 'NO'.</a:t>
+            </a:r>
+            <a:br/>
+            <a:r>
+              <a:t>🧭 Tu brújula ética, comercial y de tiempo de vida.</a:t>
             </a:r>
           </a:p>
         </p:txBody>
@@ -4222,7 +6830,7 @@
           <a:lstStyle/>
           <a:p>
             <a:pPr>
-              <a:defRPr sz="1050" b="1">
+              <a:defRPr sz="1000" b="1">
                 <a:solidFill>
                   <a:srgbClr val="B4871E"/>
                 </a:solidFill>
@@ -4230,7 +6838,7 @@
               </a:defRPr>
             </a:pPr>
             <a:r>
-              <a:t>CUADRO COMPARATIVO • PARTE 1</a:t>
+              <a:t>PILAR 1 • MODO LÍDER</a:t>
             </a:r>
           </a:p>
         </p:txBody>
@@ -4266,337 +6874,451 @@
               </a:defRPr>
             </a:pPr>
             <a:r>
-              <a:t>Emprendedor tradicional / no consciente vs. Emprendedor consciente</a:t>
-            </a:r>
-          </a:p>
-        </p:txBody>
-      </p:sp>
-      <p:graphicFrame>
-        <p:nvGraphicFramePr>
-          <p:cNvPr id="5" name="Table 4"/>
-          <p:cNvGraphicFramePr>
-            <a:graphicFrameLocks noGrp="1"/>
-          </p:cNvGraphicFramePr>
-          <p:nvPr/>
-        </p:nvGraphicFramePr>
-        <p:xfrm>
-          <a:off x="731520" y="1600200"/>
-          <a:ext cx="10727740" cy="4572000"/>
-        </p:xfrm>
-        <a:graphic>
-          <a:graphicData uri="http://schemas.openxmlformats.org/drawingml/2006/table">
-            <a:tbl>
-              <a:tblPr firstRow="1" bandRow="1">
-                <a:tableStyleId>{5C22544A-7EE6-4342-B048-85BDC9FD1C3A}</a:tableStyleId>
-              </a:tblPr>
-              <a:tblGrid>
-                <a:gridCol w="5363870"/>
-                <a:gridCol w="5363870"/>
-              </a:tblGrid>
-              <a:tr h="762000">
-                <a:tc>
-                  <a:txBody>
-                    <a:bodyPr/>
-                    <a:lstStyle/>
-                    <a:p>
-                      <a:pPr>
-                        <a:defRPr sz="1150" b="1">
-                          <a:solidFill>
-                            <a:srgbClr val="E94560"/>
-                          </a:solidFill>
-                          <a:latin typeface="Montserrat"/>
-                        </a:defRPr>
-                      </a:pPr>
-                      <a:r>
-                        <a:t>Emprendedor tradicional / no consciente</a:t>
-                      </a:r>
-                    </a:p>
-                  </a:txBody>
-                  <a:tcPr>
-                    <a:solidFill>
-                      <a:srgbClr val="FFF3F5"/>
-                    </a:solidFill>
-                  </a:tcPr>
-                </a:tc>
-                <a:tc>
-                  <a:txBody>
-                    <a:bodyPr/>
-                    <a:lstStyle/>
-                    <a:p>
-                      <a:pPr>
-                        <a:defRPr sz="1150" b="1">
-                          <a:solidFill>
-                            <a:srgbClr val="B4871E"/>
-                          </a:solidFill>
-                          <a:latin typeface="Montserrat"/>
-                        </a:defRPr>
-                      </a:pPr>
-                      <a:r>
-                        <a:t>Emprendedor consciente</a:t>
-                      </a:r>
-                    </a:p>
-                  </a:txBody>
-                  <a:tcPr>
-                    <a:solidFill>
-                      <a:srgbClr val="FEF9EB"/>
-                    </a:solidFill>
-                  </a:tcPr>
-                </a:tc>
-              </a:tr>
-              <a:tr h="762000">
-                <a:tc>
-                  <a:txBody>
-                    <a:bodyPr/>
-                    <a:lstStyle/>
-                    <a:p>
-                      <a:pPr>
-                        <a:defRPr sz="1100">
-                          <a:solidFill>
-                            <a:srgbClr val="1B1F2A"/>
-                          </a:solidFill>
-                          <a:latin typeface="Montserrat"/>
-                        </a:defRPr>
-                      </a:pPr>
-                      <a:r>
-                        <a:t>Busca resultados rápidos</a:t>
-                      </a:r>
-                    </a:p>
-                  </a:txBody>
-                  <a:tcPr>
-                    <a:solidFill>
-                      <a:srgbClr val="FFFFFF"/>
-                    </a:solidFill>
-                  </a:tcPr>
-                </a:tc>
-                <a:tc>
-                  <a:txBody>
-                    <a:bodyPr/>
-                    <a:lstStyle/>
-                    <a:p>
-                      <a:pPr>
-                        <a:defRPr sz="1100" b="1">
-                          <a:solidFill>
-                            <a:srgbClr val="1B1F2A"/>
-                          </a:solidFill>
-                          <a:latin typeface="Montserrat"/>
-                        </a:defRPr>
-                      </a:pPr>
-                      <a:r>
-                        <a:t>Construye relaciones y conexión hacia resultados sostenibles</a:t>
-                      </a:r>
-                    </a:p>
-                  </a:txBody>
-                  <a:tcPr>
-                    <a:solidFill>
-                      <a:srgbClr val="FFFDF8"/>
-                    </a:solidFill>
-                  </a:tcPr>
-                </a:tc>
-              </a:tr>
-              <a:tr h="762000">
-                <a:tc>
-                  <a:txBody>
-                    <a:bodyPr/>
-                    <a:lstStyle/>
-                    <a:p>
-                      <a:pPr>
-                        <a:defRPr sz="1100">
-                          <a:solidFill>
-                            <a:srgbClr val="1B1F2A"/>
-                          </a:solidFill>
-                          <a:latin typeface="Montserrat"/>
-                        </a:defRPr>
-                      </a:pPr>
-                      <a:r>
-                        <a:t>Decide principalmente por dinero</a:t>
-                      </a:r>
-                    </a:p>
-                  </a:txBody>
-                  <a:tcPr>
-                    <a:solidFill>
-                      <a:srgbClr val="FFFFFF"/>
-                    </a:solidFill>
-                  </a:tcPr>
-                </a:tc>
-                <a:tc>
-                  <a:txBody>
-                    <a:bodyPr/>
-                    <a:lstStyle/>
-                    <a:p>
-                      <a:pPr>
-                        <a:defRPr sz="1100" b="1">
-                          <a:solidFill>
-                            <a:srgbClr val="1B1F2A"/>
-                          </a:solidFill>
-                          <a:latin typeface="Montserrat"/>
-                        </a:defRPr>
-                      </a:pPr>
-                      <a:r>
-                        <a:t>Decide considerando propósito + impacto hacia el dinero</a:t>
-                      </a:r>
-                    </a:p>
-                  </a:txBody>
-                  <a:tcPr>
-                    <a:solidFill>
-                      <a:srgbClr val="FFFDF8"/>
-                    </a:solidFill>
-                  </a:tcPr>
-                </a:tc>
-              </a:tr>
-              <a:tr h="762000">
-                <a:tc>
-                  <a:txBody>
-                    <a:bodyPr/>
-                    <a:lstStyle/>
-                    <a:p>
-                      <a:pPr>
-                        <a:defRPr sz="1100">
-                          <a:solidFill>
-                            <a:srgbClr val="1B1F2A"/>
-                          </a:solidFill>
-                          <a:latin typeface="Montserrat"/>
-                        </a:defRPr>
-                      </a:pPr>
-                      <a:r>
-                        <a:t>Vende lo que puede</a:t>
-                      </a:r>
-                    </a:p>
-                  </a:txBody>
-                  <a:tcPr>
-                    <a:solidFill>
-                      <a:srgbClr val="FFFFFF"/>
-                    </a:solidFill>
-                  </a:tcPr>
-                </a:tc>
-                <a:tc>
-                  <a:txBody>
-                    <a:bodyPr/>
-                    <a:lstStyle/>
-                    <a:p>
-                      <a:pPr>
-                        <a:defRPr sz="1100" b="1">
-                          <a:solidFill>
-                            <a:srgbClr val="1B1F2A"/>
-                          </a:solidFill>
-                          <a:latin typeface="Montserrat"/>
-                        </a:defRPr>
-                      </a:pPr>
-                      <a:r>
-                        <a:t>Busca resolver problemas reales de los clientes que decidió atender</a:t>
-                      </a:r>
-                    </a:p>
-                  </a:txBody>
-                  <a:tcPr>
-                    <a:solidFill>
-                      <a:srgbClr val="FFFDF8"/>
-                    </a:solidFill>
-                  </a:tcPr>
-                </a:tc>
-              </a:tr>
-              <a:tr h="762000">
-                <a:tc>
-                  <a:txBody>
-                    <a:bodyPr/>
-                    <a:lstStyle/>
-                    <a:p>
-                      <a:pPr>
-                        <a:defRPr sz="1100">
-                          <a:solidFill>
-                            <a:srgbClr val="1B1F2A"/>
-                          </a:solidFill>
-                          <a:latin typeface="Montserrat"/>
-                        </a:defRPr>
-                      </a:pPr>
-                      <a:r>
-                        <a:t>Compite permanentemente</a:t>
-                      </a:r>
-                    </a:p>
-                  </a:txBody>
-                  <a:tcPr>
-                    <a:solidFill>
-                      <a:srgbClr val="FFFFFF"/>
-                    </a:solidFill>
-                  </a:tcPr>
-                </a:tc>
-                <a:tc>
-                  <a:txBody>
-                    <a:bodyPr/>
-                    <a:lstStyle/>
-                    <a:p>
-                      <a:pPr>
-                        <a:defRPr sz="1100" b="1">
-                          <a:solidFill>
-                            <a:srgbClr val="1B1F2A"/>
-                          </a:solidFill>
-                          <a:latin typeface="Montserrat"/>
-                        </a:defRPr>
-                      </a:pPr>
-                      <a:r>
-                        <a:t>Puede colaborar y crear redes desde el respeto, los límites y los acuerdos</a:t>
-                      </a:r>
-                    </a:p>
-                  </a:txBody>
-                  <a:tcPr>
-                    <a:solidFill>
-                      <a:srgbClr val="FFFDF8"/>
-                    </a:solidFill>
-                  </a:tcPr>
-                </a:tc>
-              </a:tr>
-              <a:tr h="762000">
-                <a:tc>
-                  <a:txBody>
-                    <a:bodyPr/>
-                    <a:lstStyle/>
-                    <a:p>
-                      <a:pPr>
-                        <a:defRPr sz="1100">
-                          <a:solidFill>
-                            <a:srgbClr val="1B1F2A"/>
-                          </a:solidFill>
-                          <a:latin typeface="Montserrat"/>
-                        </a:defRPr>
-                      </a:pPr>
-                      <a:r>
-                        <a:t>Trabaja hasta agotarse</a:t>
-                      </a:r>
-                    </a:p>
-                  </a:txBody>
-                  <a:tcPr>
-                    <a:solidFill>
-                      <a:srgbClr val="FFFFFF"/>
-                    </a:solidFill>
-                  </a:tcPr>
-                </a:tc>
-                <a:tc>
-                  <a:txBody>
-                    <a:bodyPr/>
-                    <a:lstStyle/>
-                    <a:p>
-                      <a:pPr>
-                        <a:defRPr sz="1100" b="1">
-                          <a:solidFill>
-                            <a:srgbClr val="1B1F2A"/>
-                          </a:solidFill>
-                          <a:latin typeface="Montserrat"/>
-                        </a:defRPr>
-                      </a:pPr>
-                      <a:r>
-                        <a:t>Aprende a gestionar su bienestar, su energía y recursos</a:t>
-                      </a:r>
-                    </a:p>
-                  </a:txBody>
-                  <a:tcPr>
-                    <a:solidFill>
-                      <a:srgbClr val="FFFDF8"/>
-                    </a:solidFill>
-                  </a:tcPr>
-                </a:tc>
-              </a:tr>
-            </a:tbl>
-          </a:graphicData>
-        </a:graphic>
-      </p:graphicFrame>
+              <a:t>Pilar 1: El Poder del 'NO' y los Límites Conscientes</a:t>
+            </a:r>
+          </a:p>
+        </p:txBody>
+      </p:sp>
+      <p:sp>
+        <p:nvSpPr>
+          <p:cNvPr id="5" name="Rounded Rectangle 4"/>
+          <p:cNvSpPr/>
+          <p:nvPr/>
+        </p:nvSpPr>
+        <p:spPr>
+          <a:xfrm>
+            <a:off x="731520" y="1554480"/>
+            <a:ext cx="3474720" cy="3108960"/>
+          </a:xfrm>
+          <a:prstGeom prst="roundRect">
+            <a:avLst/>
+          </a:prstGeom>
+          <a:solidFill>
+            <a:srgbClr val="FFFFFF"/>
+          </a:solidFill>
+          <a:ln w="12700">
+            <a:solidFill>
+              <a:srgbClr val="E2E6EE"/>
+            </a:solidFill>
+          </a:ln>
+        </p:spPr>
+        <p:style>
+          <a:lnRef idx="1">
+            <a:schemeClr val="accent1"/>
+          </a:lnRef>
+          <a:fillRef idx="3">
+            <a:schemeClr val="accent1"/>
+          </a:fillRef>
+          <a:effectRef idx="2">
+            <a:schemeClr val="accent1"/>
+          </a:effectRef>
+          <a:fontRef idx="minor">
+            <a:schemeClr val="lt1"/>
+          </a:fontRef>
+        </p:style>
+        <p:txBody>
+          <a:bodyPr rtlCol="0" anchor="ctr"/>
+          <a:lstStyle/>
+          <a:p>
+            <a:pPr algn="ctr"/>
+          </a:p>
+        </p:txBody>
+      </p:sp>
+      <p:sp>
+        <p:nvSpPr>
+          <p:cNvPr id="6" name="TextBox 5"/>
+          <p:cNvSpPr txBox="1"/>
+          <p:nvPr/>
+        </p:nvSpPr>
+        <p:spPr>
+          <a:xfrm>
+            <a:off x="914400" y="1737360"/>
+            <a:ext cx="3108960" cy="2743200"/>
+          </a:xfrm>
+          <a:prstGeom prst="rect">
+            <a:avLst/>
+          </a:prstGeom>
+          <a:noFill/>
+        </p:spPr>
+        <p:txBody>
+          <a:bodyPr wrap="square">
+            <a:spAutoFit/>
+          </a:bodyPr>
+          <a:lstStyle/>
+          <a:p>
+            <a:pPr>
+              <a:defRPr sz="1200" b="1">
+                <a:solidFill>
+                  <a:srgbClr val="E94560"/>
+                </a:solidFill>
+                <a:latin typeface="Montserrat"/>
+              </a:defRPr>
+            </a:pPr>
+            <a:r>
+              <a:t>NO TODO CLIENTE</a:t>
+            </a:r>
+          </a:p>
+          <a:p>
+            <a:pPr>
+              <a:spcBef>
+                <a:spcPts val="800"/>
+              </a:spcBef>
+              <a:defRPr sz="1200" b="1">
+                <a:solidFill>
+                  <a:srgbClr val="1B1F2A"/>
+                </a:solidFill>
+                <a:latin typeface="Montserrat"/>
+              </a:defRPr>
+            </a:pPr>
+            <a:r>
+              <a:t>No todo cliente es un buen cliente para tu negocio.</a:t>
+            </a:r>
+          </a:p>
+          <a:p>
+            <a:pPr>
+              <a:spcBef>
+                <a:spcPts val="800"/>
+              </a:spcBef>
+              <a:defRPr sz="1100">
+                <a:solidFill>
+                  <a:srgbClr val="5A6473"/>
+                </a:solidFill>
+                <a:latin typeface="Montserrat"/>
+              </a:defRPr>
+            </a:pPr>
+            <a:r>
+              <a:t>Atender clientes desalineados agota tu energía y destruye tu rentabilidad.</a:t>
+            </a:r>
+          </a:p>
+        </p:txBody>
+      </p:sp>
+      <p:sp>
+        <p:nvSpPr>
+          <p:cNvPr id="7" name="Rounded Rectangle 6"/>
+          <p:cNvSpPr/>
+          <p:nvPr/>
+        </p:nvSpPr>
+        <p:spPr>
+          <a:xfrm>
+            <a:off x="4343400" y="1554480"/>
+            <a:ext cx="3474720" cy="3108960"/>
+          </a:xfrm>
+          <a:prstGeom prst="roundRect">
+            <a:avLst/>
+          </a:prstGeom>
+          <a:solidFill>
+            <a:srgbClr val="FFFFFF"/>
+          </a:solidFill>
+          <a:ln w="12700">
+            <a:solidFill>
+              <a:srgbClr val="E2E6EE"/>
+            </a:solidFill>
+          </a:ln>
+        </p:spPr>
+        <p:style>
+          <a:lnRef idx="1">
+            <a:schemeClr val="accent1"/>
+          </a:lnRef>
+          <a:fillRef idx="3">
+            <a:schemeClr val="accent1"/>
+          </a:fillRef>
+          <a:effectRef idx="2">
+            <a:schemeClr val="accent1"/>
+          </a:effectRef>
+          <a:fontRef idx="minor">
+            <a:schemeClr val="lt1"/>
+          </a:fontRef>
+        </p:style>
+        <p:txBody>
+          <a:bodyPr rtlCol="0" anchor="ctr"/>
+          <a:lstStyle/>
+          <a:p>
+            <a:pPr algn="ctr"/>
+          </a:p>
+        </p:txBody>
+      </p:sp>
+      <p:sp>
+        <p:nvSpPr>
+          <p:cNvPr id="8" name="TextBox 7"/>
+          <p:cNvSpPr txBox="1"/>
+          <p:nvPr/>
+        </p:nvSpPr>
+        <p:spPr>
+          <a:xfrm>
+            <a:off x="4526280" y="1737360"/>
+            <a:ext cx="3108960" cy="2743200"/>
+          </a:xfrm>
+          <a:prstGeom prst="rect">
+            <a:avLst/>
+          </a:prstGeom>
+          <a:noFill/>
+        </p:spPr>
+        <p:txBody>
+          <a:bodyPr wrap="square">
+            <a:spAutoFit/>
+          </a:bodyPr>
+          <a:lstStyle/>
+          <a:p>
+            <a:pPr>
+              <a:defRPr sz="1200" b="1">
+                <a:solidFill>
+                  <a:srgbClr val="E94560"/>
+                </a:solidFill>
+                <a:latin typeface="Montserrat"/>
+              </a:defRPr>
+            </a:pPr>
+            <a:r>
+              <a:t>NO TODA OPORTUNIDAD</a:t>
+            </a:r>
+          </a:p>
+          <a:p>
+            <a:pPr>
+              <a:spcBef>
+                <a:spcPts val="800"/>
+              </a:spcBef>
+              <a:defRPr sz="1200" b="1">
+                <a:solidFill>
+                  <a:srgbClr val="1B1F2A"/>
+                </a:solidFill>
+                <a:latin typeface="Montserrat"/>
+              </a:defRPr>
+            </a:pPr>
+            <a:r>
+              <a:t>No toda oportunidad es una buena oportunidad.</a:t>
+            </a:r>
+          </a:p>
+          <a:p>
+            <a:pPr>
+              <a:spcBef>
+                <a:spcPts val="800"/>
+              </a:spcBef>
+              <a:defRPr sz="1100">
+                <a:solidFill>
+                  <a:srgbClr val="5A6473"/>
+                </a:solidFill>
+                <a:latin typeface="Montserrat"/>
+              </a:defRPr>
+            </a:pPr>
+            <a:r>
+              <a:t>Aprende a distinguir entre una verdadera oportunidad y una distracción brillante.</a:t>
+            </a:r>
+          </a:p>
+        </p:txBody>
+      </p:sp>
+      <p:sp>
+        <p:nvSpPr>
+          <p:cNvPr id="9" name="Rounded Rectangle 8"/>
+          <p:cNvSpPr/>
+          <p:nvPr/>
+        </p:nvSpPr>
+        <p:spPr>
+          <a:xfrm>
+            <a:off x="7955280" y="1554480"/>
+            <a:ext cx="3474720" cy="3108960"/>
+          </a:xfrm>
+          <a:prstGeom prst="roundRect">
+            <a:avLst/>
+          </a:prstGeom>
+          <a:solidFill>
+            <a:srgbClr val="FFFFFF"/>
+          </a:solidFill>
+          <a:ln w="12700">
+            <a:solidFill>
+              <a:srgbClr val="E2E6EE"/>
+            </a:solidFill>
+          </a:ln>
+        </p:spPr>
+        <p:style>
+          <a:lnRef idx="1">
+            <a:schemeClr val="accent1"/>
+          </a:lnRef>
+          <a:fillRef idx="3">
+            <a:schemeClr val="accent1"/>
+          </a:fillRef>
+          <a:effectRef idx="2">
+            <a:schemeClr val="accent1"/>
+          </a:effectRef>
+          <a:fontRef idx="minor">
+            <a:schemeClr val="lt1"/>
+          </a:fontRef>
+        </p:style>
+        <p:txBody>
+          <a:bodyPr rtlCol="0" anchor="ctr"/>
+          <a:lstStyle/>
+          <a:p>
+            <a:pPr algn="ctr"/>
+          </a:p>
+        </p:txBody>
+      </p:sp>
+      <p:sp>
+        <p:nvSpPr>
+          <p:cNvPr id="10" name="TextBox 9"/>
+          <p:cNvSpPr txBox="1"/>
+          <p:nvPr/>
+        </p:nvSpPr>
+        <p:spPr>
+          <a:xfrm>
+            <a:off x="8138160" y="1737360"/>
+            <a:ext cx="3108960" cy="2743200"/>
+          </a:xfrm>
+          <a:prstGeom prst="rect">
+            <a:avLst/>
+          </a:prstGeom>
+          <a:noFill/>
+        </p:spPr>
+        <p:txBody>
+          <a:bodyPr wrap="square">
+            <a:spAutoFit/>
+          </a:bodyPr>
+          <a:lstStyle/>
+          <a:p>
+            <a:pPr>
+              <a:defRPr sz="1200" b="1">
+                <a:solidFill>
+                  <a:srgbClr val="E94560"/>
+                </a:solidFill>
+                <a:latin typeface="Montserrat"/>
+              </a:defRPr>
+            </a:pPr>
+            <a:r>
+              <a:t>NO TODO CRECIMIENTO</a:t>
+            </a:r>
+          </a:p>
+          <a:p>
+            <a:pPr>
+              <a:spcBef>
+                <a:spcPts val="800"/>
+              </a:spcBef>
+              <a:defRPr sz="1200" b="1">
+                <a:solidFill>
+                  <a:srgbClr val="1B1F2A"/>
+                </a:solidFill>
+                <a:latin typeface="Montserrat"/>
+              </a:defRPr>
+            </a:pPr>
+            <a:r>
+              <a:t>No todo crecimiento es crecimiento saludable.</a:t>
+            </a:r>
+          </a:p>
+          <a:p>
+            <a:pPr>
+              <a:spcBef>
+                <a:spcPts val="800"/>
+              </a:spcBef>
+              <a:defRPr sz="1100">
+                <a:solidFill>
+                  <a:srgbClr val="5A6473"/>
+                </a:solidFill>
+                <a:latin typeface="Montserrat"/>
+              </a:defRPr>
+            </a:pPr>
+            <a:r>
+              <a:t>Crecer sin estructura ni margen genera caos, deudas y burnout.</a:t>
+            </a:r>
+          </a:p>
+        </p:txBody>
+      </p:sp>
+      <p:sp>
+        <p:nvSpPr>
+          <p:cNvPr id="11" name="Rounded Rectangle 10"/>
+          <p:cNvSpPr/>
+          <p:nvPr/>
+        </p:nvSpPr>
+        <p:spPr>
+          <a:xfrm>
+            <a:off x="731520" y="4846320"/>
+            <a:ext cx="10728655" cy="1371600"/>
+          </a:xfrm>
+          <a:prstGeom prst="roundRect">
+            <a:avLst/>
+          </a:prstGeom>
+          <a:solidFill>
+            <a:srgbClr val="FEF9EB"/>
+          </a:solidFill>
+          <a:ln w="12700">
+            <a:solidFill>
+              <a:srgbClr val="D4AF37"/>
+            </a:solidFill>
+          </a:ln>
+        </p:spPr>
+        <p:style>
+          <a:lnRef idx="1">
+            <a:schemeClr val="accent1"/>
+          </a:lnRef>
+          <a:fillRef idx="3">
+            <a:schemeClr val="accent1"/>
+          </a:fillRef>
+          <a:effectRef idx="2">
+            <a:schemeClr val="accent1"/>
+          </a:effectRef>
+          <a:fontRef idx="minor">
+            <a:schemeClr val="lt1"/>
+          </a:fontRef>
+        </p:style>
+        <p:txBody>
+          <a:bodyPr rtlCol="0" anchor="ctr"/>
+          <a:lstStyle/>
+          <a:p>
+            <a:pPr algn="ctr"/>
+          </a:p>
+        </p:txBody>
+      </p:sp>
+      <p:sp>
+        <p:nvSpPr>
+          <p:cNvPr id="12" name="TextBox 11"/>
+          <p:cNvSpPr txBox="1"/>
+          <p:nvPr/>
+        </p:nvSpPr>
+        <p:spPr>
+          <a:xfrm>
+            <a:off x="1005840" y="4983480"/>
+            <a:ext cx="10149840" cy="1097280"/>
+          </a:xfrm>
+          <a:prstGeom prst="rect">
+            <a:avLst/>
+          </a:prstGeom>
+          <a:noFill/>
+        </p:spPr>
+        <p:txBody>
+          <a:bodyPr wrap="square">
+            <a:spAutoFit/>
+          </a:bodyPr>
+          <a:lstStyle/>
+          <a:p>
+            <a:pPr>
+              <a:defRPr sz="1100" b="1">
+                <a:solidFill>
+                  <a:srgbClr val="B4871E"/>
+                </a:solidFill>
+                <a:latin typeface="Montserrat"/>
+              </a:defRPr>
+            </a:pPr>
+            <a:r>
+              <a:t>LA CLARIDAD TE DA EL PODER DE DECIR:</a:t>
+            </a:r>
+          </a:p>
+          <a:p>
+            <a:pPr>
+              <a:spcBef>
+                <a:spcPts val="400"/>
+              </a:spcBef>
+              <a:defRPr sz="1400" b="1">
+                <a:solidFill>
+                  <a:srgbClr val="1B1F2A"/>
+                </a:solidFill>
+                <a:latin typeface="Montserrat"/>
+              </a:defRPr>
+            </a:pPr>
+            <a:r>
+              <a:t>“Esto SÍ es para mi negocio. Esto NO. Por acá voy. Por acá NO.”</a:t>
+            </a:r>
+            <a:br/>
+            <a:r>
+              <a:t>Y desde esa claridad, recién entonces puedes gestionar.</a:t>
+            </a:r>
+          </a:p>
+        </p:txBody>
+      </p:sp>
     </p:spTree>
   </p:cSld>
   <p:clrMapOvr>
@@ -4681,7 +7403,7 @@
           <a:lstStyle/>
           <a:p>
             <a:pPr>
-              <a:defRPr sz="1050" b="1">
+              <a:defRPr sz="1000" b="1">
                 <a:solidFill>
                   <a:srgbClr val="B4871E"/>
                 </a:solidFill>
@@ -4689,7 +7411,7 @@
               </a:defRPr>
             </a:pPr>
             <a:r>
-              <a:t>CUADRO COMPARATIVO • PARTE 2</a:t>
+              <a:t>PILAR 2 • MODO LÍDER</a:t>
             </a:r>
           </a:p>
         </p:txBody>
@@ -4725,337 +7447,222 @@
               </a:defRPr>
             </a:pPr>
             <a:r>
-              <a:t>Emprendedor tradicional / no consciente vs. Emprendedor consciente</a:t>
-            </a:r>
-          </a:p>
-        </p:txBody>
-      </p:sp>
-      <p:graphicFrame>
-        <p:nvGraphicFramePr>
-          <p:cNvPr id="5" name="Table 4"/>
-          <p:cNvGraphicFramePr>
-            <a:graphicFrameLocks noGrp="1"/>
-          </p:cNvGraphicFramePr>
-          <p:nvPr/>
-        </p:nvGraphicFramePr>
-        <p:xfrm>
-          <a:off x="731520" y="1600200"/>
-          <a:ext cx="10727740" cy="4572000"/>
-        </p:xfrm>
-        <a:graphic>
-          <a:graphicData uri="http://schemas.openxmlformats.org/drawingml/2006/table">
-            <a:tbl>
-              <a:tblPr firstRow="1" bandRow="1">
-                <a:tableStyleId>{5C22544A-7EE6-4342-B048-85BDC9FD1C3A}</a:tableStyleId>
-              </a:tblPr>
-              <a:tblGrid>
-                <a:gridCol w="5363870"/>
-                <a:gridCol w="5363870"/>
-              </a:tblGrid>
-              <a:tr h="762000">
-                <a:tc>
-                  <a:txBody>
-                    <a:bodyPr/>
-                    <a:lstStyle/>
-                    <a:p>
-                      <a:pPr>
-                        <a:defRPr sz="1150" b="1">
-                          <a:solidFill>
-                            <a:srgbClr val="E94560"/>
-                          </a:solidFill>
-                          <a:latin typeface="Montserrat"/>
-                        </a:defRPr>
-                      </a:pPr>
-                      <a:r>
-                        <a:t>Emprendedor tradicional / no consciente</a:t>
-                      </a:r>
-                    </a:p>
-                  </a:txBody>
-                  <a:tcPr>
-                    <a:solidFill>
-                      <a:srgbClr val="FFF3F5"/>
-                    </a:solidFill>
-                  </a:tcPr>
-                </a:tc>
-                <a:tc>
-                  <a:txBody>
-                    <a:bodyPr/>
-                    <a:lstStyle/>
-                    <a:p>
-                      <a:pPr>
-                        <a:defRPr sz="1150" b="1">
-                          <a:solidFill>
-                            <a:srgbClr val="B4871E"/>
-                          </a:solidFill>
-                          <a:latin typeface="Montserrat"/>
-                        </a:defRPr>
-                      </a:pPr>
-                      <a:r>
-                        <a:t>Emprendedor consciente</a:t>
-                      </a:r>
-                    </a:p>
-                  </a:txBody>
-                  <a:tcPr>
-                    <a:solidFill>
-                      <a:srgbClr val="FEF9EB"/>
-                    </a:solidFill>
-                  </a:tcPr>
-                </a:tc>
-              </a:tr>
-              <a:tr h="762000">
-                <a:tc>
-                  <a:txBody>
-                    <a:bodyPr/>
-                    <a:lstStyle/>
-                    <a:p>
-                      <a:pPr>
-                        <a:defRPr sz="1100">
-                          <a:solidFill>
-                            <a:srgbClr val="1B1F2A"/>
-                          </a:solidFill>
-                          <a:latin typeface="Montserrat"/>
-                        </a:defRPr>
-                      </a:pPr>
-                      <a:r>
-                        <a:t>Busca demostrar que puede</a:t>
-                      </a:r>
-                    </a:p>
-                  </a:txBody>
-                  <a:tcPr>
-                    <a:solidFill>
-                      <a:srgbClr val="FFFFFF"/>
-                    </a:solidFill>
-                  </a:tcPr>
-                </a:tc>
-                <a:tc>
-                  <a:txBody>
-                    <a:bodyPr/>
-                    <a:lstStyle/>
-                    <a:p>
-                      <a:pPr>
-                        <a:defRPr sz="1100" b="1">
-                          <a:solidFill>
-                            <a:srgbClr val="1B1F2A"/>
-                          </a:solidFill>
-                          <a:latin typeface="Montserrat"/>
-                        </a:defRPr>
-                      </a:pPr>
-                      <a:r>
-                        <a:t>Busca construir algo que tenga sentido y que genere dinero</a:t>
-                      </a:r>
-                    </a:p>
-                  </a:txBody>
-                  <a:tcPr>
-                    <a:solidFill>
-                      <a:srgbClr val="FFFDF8"/>
-                    </a:solidFill>
-                  </a:tcPr>
-                </a:tc>
-              </a:tr>
-              <a:tr h="762000">
-                <a:tc>
-                  <a:txBody>
-                    <a:bodyPr/>
-                    <a:lstStyle/>
-                    <a:p>
-                      <a:pPr>
-                        <a:defRPr sz="1100">
-                          <a:solidFill>
-                            <a:srgbClr val="1B1F2A"/>
-                          </a:solidFill>
-                          <a:latin typeface="Montserrat"/>
-                        </a:defRPr>
-                      </a:pPr>
-                      <a:r>
-                        <a:t>Se identifica con el resultado</a:t>
-                      </a:r>
-                    </a:p>
-                  </a:txBody>
-                  <a:tcPr>
-                    <a:solidFill>
-                      <a:srgbClr val="FFFFFF"/>
-                    </a:solidFill>
-                  </a:tcPr>
-                </a:tc>
-                <a:tc>
-                  <a:txBody>
-                    <a:bodyPr/>
-                    <a:lstStyle/>
-                    <a:p>
-                      <a:pPr>
-                        <a:defRPr sz="1100" b="1">
-                          <a:solidFill>
-                            <a:srgbClr val="1B1F2A"/>
-                          </a:solidFill>
-                          <a:latin typeface="Montserrat"/>
-                        </a:defRPr>
-                      </a:pPr>
-                      <a:r>
-                        <a:t>Aprende del resultado y sigue mejorando o escalando</a:t>
-                      </a:r>
-                    </a:p>
-                  </a:txBody>
-                  <a:tcPr>
-                    <a:solidFill>
-                      <a:srgbClr val="FFFDF8"/>
-                    </a:solidFill>
-                  </a:tcPr>
-                </a:tc>
-              </a:tr>
-              <a:tr h="762000">
-                <a:tc>
-                  <a:txBody>
-                    <a:bodyPr/>
-                    <a:lstStyle/>
-                    <a:p>
-                      <a:pPr>
-                        <a:defRPr sz="1100">
-                          <a:solidFill>
-                            <a:srgbClr val="1B1F2A"/>
-                          </a:solidFill>
-                          <a:latin typeface="Montserrat"/>
-                        </a:defRPr>
-                      </a:pPr>
-                      <a:r>
-                        <a:t>Tiene miedo de equivocarse</a:t>
-                      </a:r>
-                    </a:p>
-                  </a:txBody>
-                  <a:tcPr>
-                    <a:solidFill>
-                      <a:srgbClr val="FFFFFF"/>
-                    </a:solidFill>
-                  </a:tcPr>
-                </a:tc>
-                <a:tc>
-                  <a:txBody>
-                    <a:bodyPr/>
-                    <a:lstStyle/>
-                    <a:p>
-                      <a:pPr>
-                        <a:defRPr sz="1100" b="1">
-                          <a:solidFill>
-                            <a:srgbClr val="1B1F2A"/>
-                          </a:solidFill>
-                          <a:latin typeface="Montserrat"/>
-                        </a:defRPr>
-                      </a:pPr>
-                      <a:r>
-                        <a:t>Usa el error como información y crecimiento</a:t>
-                      </a:r>
-                    </a:p>
-                  </a:txBody>
-                  <a:tcPr>
-                    <a:solidFill>
-                      <a:srgbClr val="FFFDF8"/>
-                    </a:solidFill>
-                  </a:tcPr>
-                </a:tc>
-              </a:tr>
-              <a:tr h="762000">
-                <a:tc>
-                  <a:txBody>
-                    <a:bodyPr/>
-                    <a:lstStyle/>
-                    <a:p>
-                      <a:pPr>
-                        <a:defRPr sz="1100">
-                          <a:solidFill>
-                            <a:srgbClr val="1B1F2A"/>
-                          </a:solidFill>
-                          <a:latin typeface="Montserrat"/>
-                        </a:defRPr>
-                      </a:pPr>
-                      <a:r>
-                        <a:t>Entiende que puede crecer a cualquier costo porque así es como se gana dinero</a:t>
-                      </a:r>
-                    </a:p>
-                  </a:txBody>
-                  <a:tcPr>
-                    <a:solidFill>
-                      <a:srgbClr val="FFFFFF"/>
-                    </a:solidFill>
-                  </a:tcPr>
-                </a:tc>
-                <a:tc>
-                  <a:txBody>
-                    <a:bodyPr/>
-                    <a:lstStyle/>
-                    <a:p>
-                      <a:pPr>
-                        <a:defRPr sz="1100" b="1">
-                          <a:solidFill>
-                            <a:srgbClr val="1B1F2A"/>
-                          </a:solidFill>
-                          <a:latin typeface="Montserrat"/>
-                        </a:defRPr>
-                      </a:pPr>
-                      <a:r>
-                        <a:t>Define qué costo no está dispuesto a pagar con sabiduría y en coherencia con sus valores</a:t>
-                      </a:r>
-                    </a:p>
-                  </a:txBody>
-                  <a:tcPr>
-                    <a:solidFill>
-                      <a:srgbClr val="FFFDF8"/>
-                    </a:solidFill>
-                  </a:tcPr>
-                </a:tc>
-              </a:tr>
-              <a:tr h="762000">
-                <a:tc>
-                  <a:txBody>
-                    <a:bodyPr/>
-                    <a:lstStyle/>
-                    <a:p>
-                      <a:pPr>
-                        <a:defRPr sz="1100">
-                          <a:solidFill>
-                            <a:srgbClr val="1B1F2A"/>
-                          </a:solidFill>
-                          <a:latin typeface="Montserrat"/>
-                        </a:defRPr>
-                      </a:pPr>
-                      <a:r>
-                        <a:t>Pregunta “¿cuánto gano?”</a:t>
-                      </a:r>
-                    </a:p>
-                  </a:txBody>
-                  <a:tcPr>
-                    <a:solidFill>
-                      <a:srgbClr val="FFFFFF"/>
-                    </a:solidFill>
-                  </a:tcPr>
-                </a:tc>
-                <a:tc>
-                  <a:txBody>
-                    <a:bodyPr/>
-                    <a:lstStyle/>
-                    <a:p>
-                      <a:pPr>
-                        <a:defRPr sz="1100" b="1">
-                          <a:solidFill>
-                            <a:srgbClr val="1B1F2A"/>
-                          </a:solidFill>
-                          <a:latin typeface="Montserrat"/>
-                        </a:defRPr>
-                      </a:pPr>
-                      <a:r>
-                        <a:t>Pregunta “¿Qué genero y qué construyo y cuánto gano?”</a:t>
-                      </a:r>
-                    </a:p>
-                  </a:txBody>
-                  <a:tcPr>
-                    <a:solidFill>
-                      <a:srgbClr val="FFFDF8"/>
-                    </a:solidFill>
-                  </a:tcPr>
-                </a:tc>
-              </a:tr>
-            </a:tbl>
-          </a:graphicData>
-        </a:graphic>
-      </p:graphicFrame>
+              <a:t>Pilar 2: Se Conoce y se Autolidera</a:t>
+            </a:r>
+          </a:p>
+        </p:txBody>
+      </p:sp>
+      <p:sp>
+        <p:nvSpPr>
+          <p:cNvPr id="5" name="Rounded Rectangle 4"/>
+          <p:cNvSpPr/>
+          <p:nvPr/>
+        </p:nvSpPr>
+        <p:spPr>
+          <a:xfrm>
+            <a:off x="731520" y="1554480"/>
+            <a:ext cx="5212080" cy="4663440"/>
+          </a:xfrm>
+          <a:prstGeom prst="roundRect">
+            <a:avLst/>
+          </a:prstGeom>
+          <a:solidFill>
+            <a:srgbClr val="FFFFFF"/>
+          </a:solidFill>
+          <a:ln w="12700">
+            <a:solidFill>
+              <a:srgbClr val="E2E6EE"/>
+            </a:solidFill>
+          </a:ln>
+        </p:spPr>
+        <p:style>
+          <a:lnRef idx="1">
+            <a:schemeClr val="accent1"/>
+          </a:lnRef>
+          <a:fillRef idx="3">
+            <a:schemeClr val="accent1"/>
+          </a:fillRef>
+          <a:effectRef idx="2">
+            <a:schemeClr val="accent1"/>
+          </a:effectRef>
+          <a:fontRef idx="minor">
+            <a:schemeClr val="lt1"/>
+          </a:fontRef>
+        </p:style>
+        <p:txBody>
+          <a:bodyPr rtlCol="0" anchor="ctr"/>
+          <a:lstStyle/>
+          <a:p>
+            <a:pPr algn="ctr"/>
+          </a:p>
+        </p:txBody>
+      </p:sp>
+      <p:sp>
+        <p:nvSpPr>
+          <p:cNvPr id="6" name="TextBox 5"/>
+          <p:cNvSpPr txBox="1"/>
+          <p:nvPr/>
+        </p:nvSpPr>
+        <p:spPr>
+          <a:xfrm>
+            <a:off x="1005840" y="1737360"/>
+            <a:ext cx="4663440" cy="4297680"/>
+          </a:xfrm>
+          <a:prstGeom prst="rect">
+            <a:avLst/>
+          </a:prstGeom>
+          <a:noFill/>
+        </p:spPr>
+        <p:txBody>
+          <a:bodyPr wrap="square">
+            <a:spAutoFit/>
+          </a:bodyPr>
+          <a:lstStyle/>
+          <a:p>
+            <a:pPr>
+              <a:defRPr sz="1300" b="1">
+                <a:solidFill>
+                  <a:srgbClr val="B4871E"/>
+                </a:solidFill>
+                <a:latin typeface="Montserrat"/>
+              </a:defRPr>
+            </a:pPr>
+            <a:r>
+              <a:t>EL NEGOCIO REFLEJA A SU LÍDER</a:t>
+            </a:r>
+          </a:p>
+          <a:p>
+            <a:pPr>
+              <a:spcBef>
+                <a:spcPts val="1000"/>
+              </a:spcBef>
+              <a:defRPr sz="1250">
+                <a:solidFill>
+                  <a:srgbClr val="1B1F2A"/>
+                </a:solidFill>
+                <a:latin typeface="Montserrat"/>
+              </a:defRPr>
+            </a:pPr>
+            <a:r>
+              <a:t>El negocio está directamente atravesado por quien lo dirige.</a:t>
+            </a:r>
+            <a:br/>
+            <a:br/>
+            <a:r>
+              <a:t>Tus miedos, tus bloqueos con el dinero, tu incapacidad para delegar o tu falta de límites se trasladan inmediatamente a tus resultados empresariales.</a:t>
+            </a:r>
+          </a:p>
+        </p:txBody>
+      </p:sp>
+      <p:sp>
+        <p:nvSpPr>
+          <p:cNvPr id="7" name="Rounded Rectangle 6"/>
+          <p:cNvSpPr/>
+          <p:nvPr/>
+        </p:nvSpPr>
+        <p:spPr>
+          <a:xfrm>
+            <a:off x="6217920" y="1554480"/>
+            <a:ext cx="5212080" cy="4663440"/>
+          </a:xfrm>
+          <a:prstGeom prst="roundRect">
+            <a:avLst/>
+          </a:prstGeom>
+          <a:solidFill>
+            <a:srgbClr val="FFFFFF"/>
+          </a:solidFill>
+          <a:ln w="12700">
+            <a:solidFill>
+              <a:srgbClr val="E2E6EE"/>
+            </a:solidFill>
+          </a:ln>
+        </p:spPr>
+        <p:style>
+          <a:lnRef idx="1">
+            <a:schemeClr val="accent1"/>
+          </a:lnRef>
+          <a:fillRef idx="3">
+            <a:schemeClr val="accent1"/>
+          </a:fillRef>
+          <a:effectRef idx="2">
+            <a:schemeClr val="accent1"/>
+          </a:effectRef>
+          <a:fontRef idx="minor">
+            <a:schemeClr val="lt1"/>
+          </a:fontRef>
+        </p:style>
+        <p:txBody>
+          <a:bodyPr rtlCol="0" anchor="ctr"/>
+          <a:lstStyle/>
+          <a:p>
+            <a:pPr algn="ctr"/>
+          </a:p>
+        </p:txBody>
+      </p:sp>
+      <p:sp>
+        <p:nvSpPr>
+          <p:cNvPr id="8" name="TextBox 7"/>
+          <p:cNvSpPr txBox="1"/>
+          <p:nvPr/>
+        </p:nvSpPr>
+        <p:spPr>
+          <a:xfrm>
+            <a:off x="6492240" y="1737360"/>
+            <a:ext cx="4663440" cy="4297680"/>
+          </a:xfrm>
+          <a:prstGeom prst="rect">
+            <a:avLst/>
+          </a:prstGeom>
+          <a:noFill/>
+        </p:spPr>
+        <p:txBody>
+          <a:bodyPr wrap="square">
+            <a:spAutoFit/>
+          </a:bodyPr>
+          <a:lstStyle/>
+          <a:p>
+            <a:pPr>
+              <a:defRPr sz="1300" b="1">
+                <a:solidFill>
+                  <a:srgbClr val="1B1F2A"/>
+                </a:solidFill>
+                <a:latin typeface="Montserrat"/>
+              </a:defRPr>
+            </a:pPr>
+            <a:r>
+              <a:t>¿QUÉ HACE EL LÍDER CONSCIENTE?</a:t>
+            </a:r>
+          </a:p>
+          <a:p>
+            <a:pPr>
+              <a:spcBef>
+                <a:spcPts val="1000"/>
+              </a:spcBef>
+              <a:defRPr sz="1250">
+                <a:solidFill>
+                  <a:srgbClr val="1B1F2A"/>
+                </a:solidFill>
+                <a:latin typeface="Montserrat"/>
+              </a:defRPr>
+            </a:pPr>
+            <a:r>
+              <a:t>🧠 Reconoce sus patrones, creencias limitantes y emociones.</a:t>
+            </a:r>
+            <a:br/>
+            <a:r>
+              <a:t>🛡️ No permite que el miedo o el ego tomen las decisiones estratégicas.</a:t>
+            </a:r>
+            <a:br/>
+            <a:r>
+              <a:t>🎯 Desarrolla templanza emocional ante la incertidumbre.</a:t>
+            </a:r>
+            <a:br/>
+            <a:r>
+              <a:t>⚡ Gestiona su energía vital para sostener el ritmo de crecimiento.</a:t>
+            </a:r>
+          </a:p>
+        </p:txBody>
+      </p:sp>
     </p:spTree>
   </p:cSld>
   <p:clrMapOvr>
@@ -5140,7 +7747,7 @@
           <a:lstStyle/>
           <a:p>
             <a:pPr>
-              <a:defRPr sz="1050" b="1">
+              <a:defRPr sz="1000" b="1">
                 <a:solidFill>
                   <a:srgbClr val="B4871E"/>
                 </a:solidFill>
@@ -5148,7 +7755,7 @@
               </a:defRPr>
             </a:pPr>
             <a:r>
-              <a:t>LES PREGUNTARÍA:</a:t>
+              <a:t>PILAR 3 • MODO LÍDER</a:t>
             </a:r>
           </a:p>
         </p:txBody>
@@ -5184,7 +7791,7 @@
               </a:defRPr>
             </a:pPr>
             <a:r>
-              <a:t>🔥 Y después haría una pregunta incómoda</a:t>
+              <a:t>Pilar 3: Entiende el Dinero (Sin Miedo ni Romanticismo)</a:t>
             </a:r>
           </a:p>
         </p:txBody>
@@ -5197,18 +7804,18 @@
         </p:nvSpPr>
         <p:spPr>
           <a:xfrm>
-            <a:off x="731520" y="1600200"/>
-            <a:ext cx="10728655" cy="1371600"/>
+            <a:off x="731520" y="1463040"/>
+            <a:ext cx="10728655" cy="1005840"/>
           </a:xfrm>
           <a:prstGeom prst="roundRect">
             <a:avLst/>
           </a:prstGeom>
           <a:solidFill>
-            <a:srgbClr val="FFFFFF"/>
+            <a:srgbClr val="EEFAF4"/>
           </a:solidFill>
-          <a:ln w="19050">
+          <a:ln w="12700">
             <a:solidFill>
-              <a:srgbClr val="B4871E"/>
+              <a:srgbClr val="10956A"/>
             </a:solidFill>
           </a:ln>
         </p:spPr>
@@ -5227,46 +7834,59 @@
           </a:fontRef>
         </p:style>
         <p:txBody>
-          <a:bodyPr rtlCol="0" anchor="ctr" wrap="square" tIns="182880" lIns="365760" rIns="365760"/>
-          <a:lstStyle/>
-          <a:p>
-            <a:pPr algn="ctr">
-              <a:defRPr sz="1350" b="1">
-                <a:solidFill>
-                  <a:srgbClr val="1B1F2A"/>
-                </a:solidFill>
-                <a:latin typeface="Montserrat"/>
-              </a:defRPr>
-            </a:pPr>
-            <a:r>
-              <a:t>¿Qué estás dispuesta a hacer para que tu emprendimiento tenga éxito?</a:t>
-            </a:r>
-          </a:p>
-          <a:p>
-            <a:pPr>
-              <a:defRPr sz="1150">
-                <a:solidFill>
-                  <a:srgbClr val="5A6473"/>
-                </a:solidFill>
-                <a:latin typeface="Montserrat"/>
-              </a:defRPr>
-            </a:pPr>
-            <a:r>
-              <a:t>Aquí es donde se crea la mentalidad que necesitás para llegar lejos</a:t>
-            </a:r>
-          </a:p>
-        </p:txBody>
-      </p:sp>
-      <p:sp>
-        <p:nvSpPr>
-          <p:cNvPr id="6" name="Rounded Rectangle 5"/>
+          <a:bodyPr rtlCol="0" anchor="ctr"/>
+          <a:lstStyle/>
+          <a:p>
+            <a:pPr algn="ctr"/>
+          </a:p>
+        </p:txBody>
+      </p:sp>
+      <p:sp>
+        <p:nvSpPr>
+          <p:cNvPr id="6" name="TextBox 5"/>
+          <p:cNvSpPr txBox="1"/>
+          <p:nvPr/>
+        </p:nvSpPr>
+        <p:spPr>
+          <a:xfrm>
+            <a:off x="1005840" y="1600200"/>
+            <a:ext cx="10149840" cy="731520"/>
+          </a:xfrm>
+          <a:prstGeom prst="rect">
+            <a:avLst/>
+          </a:prstGeom>
+          <a:noFill/>
+        </p:spPr>
+        <p:txBody>
+          <a:bodyPr wrap="none">
+            <a:spAutoFit/>
+          </a:bodyPr>
+          <a:lstStyle/>
+          <a:p>
+            <a:pPr>
+              <a:defRPr sz="1400" b="1">
+                <a:solidFill>
+                  <a:srgbClr val="10956A"/>
+                </a:solidFill>
+                <a:latin typeface="Montserrat"/>
+              </a:defRPr>
+            </a:pPr>
+            <a:r>
+              <a:t>“Un negocio con propósito también tiene que ser rentable para poder sostenerse, generar impacto y crecer.”</a:t>
+            </a:r>
+          </a:p>
+        </p:txBody>
+      </p:sp>
+      <p:sp>
+        <p:nvSpPr>
+          <p:cNvPr id="7" name="Rounded Rectangle 6"/>
           <p:cNvSpPr/>
           <p:nvPr/>
         </p:nvSpPr>
         <p:spPr>
           <a:xfrm>
-            <a:off x="731520" y="3154680"/>
-            <a:ext cx="10728655" cy="1371600"/>
+            <a:off x="731520" y="2651760"/>
+            <a:ext cx="3474720" cy="3566160"/>
           </a:xfrm>
           <a:prstGeom prst="roundRect">
             <a:avLst/>
@@ -5274,9 +7894,9 @@
           <a:solidFill>
             <a:srgbClr val="FFFFFF"/>
           </a:solidFill>
-          <a:ln w="19050">
+          <a:ln w="12700">
             <a:solidFill>
-              <a:srgbClr val="E94560"/>
+              <a:srgbClr val="E2E6EE"/>
             </a:solidFill>
           </a:ln>
         </p:spPr>
@@ -5295,11 +7915,37 @@
           </a:fontRef>
         </p:style>
         <p:txBody>
-          <a:bodyPr rtlCol="0" anchor="ctr" wrap="square" tIns="182880" lIns="365760" rIns="365760"/>
-          <a:lstStyle/>
-          <a:p>
-            <a:pPr algn="ctr">
-              <a:defRPr sz="1350" b="1">
+          <a:bodyPr rtlCol="0" anchor="ctr"/>
+          <a:lstStyle/>
+          <a:p>
+            <a:pPr algn="ctr"/>
+          </a:p>
+        </p:txBody>
+      </p:sp>
+      <p:sp>
+        <p:nvSpPr>
+          <p:cNvPr id="8" name="TextBox 7"/>
+          <p:cNvSpPr txBox="1"/>
+          <p:nvPr/>
+        </p:nvSpPr>
+        <p:spPr>
+          <a:xfrm>
+            <a:off x="914400" y="2926080"/>
+            <a:ext cx="3108960" cy="3017520"/>
+          </a:xfrm>
+          <a:prstGeom prst="rect">
+            <a:avLst/>
+          </a:prstGeom>
+          <a:noFill/>
+        </p:spPr>
+        <p:txBody>
+          <a:bodyPr wrap="square">
+            <a:spAutoFit/>
+          </a:bodyPr>
+          <a:lstStyle/>
+          <a:p>
+            <a:pPr>
+              <a:defRPr sz="1300" b="1">
                 <a:solidFill>
                   <a:srgbClr val="1B1F2A"/>
                 </a:solidFill>
@@ -5307,12 +7953,15 @@
               </a:defRPr>
             </a:pPr>
             <a:r>
-              <a:t>“¿Y qué NO estás dispuesta a hacer?”</a:t>
-            </a:r>
-          </a:p>
-          <a:p>
-            <a:pPr>
-              <a:defRPr sz="1150">
+              <a:t>NÚMEROS CLAROS</a:t>
+            </a:r>
+          </a:p>
+          <a:p>
+            <a:pPr>
+              <a:spcBef>
+                <a:spcPts val="1000"/>
+              </a:spcBef>
+              <a:defRPr sz="1200">
                 <a:solidFill>
                   <a:srgbClr val="5A6473"/>
                 </a:solidFill>
@@ -5320,21 +7969,21 @@
               </a:defRPr>
             </a:pPr>
             <a:r>
-              <a:t>Aquí es donde aparecen tus valores, tus límites, tus criterios de decisión básicos</a:t>
-            </a:r>
-          </a:p>
-        </p:txBody>
-      </p:sp>
-      <p:sp>
-        <p:nvSpPr>
-          <p:cNvPr id="7" name="Rounded Rectangle 6"/>
+              <a:t>Conoce sus costos reales fijos y variables. No adivina sus finanzas.</a:t>
+            </a:r>
+          </a:p>
+        </p:txBody>
+      </p:sp>
+      <p:sp>
+        <p:nvSpPr>
+          <p:cNvPr id="9" name="Rounded Rectangle 8"/>
           <p:cNvSpPr/>
           <p:nvPr/>
         </p:nvSpPr>
         <p:spPr>
           <a:xfrm>
-            <a:off x="731520" y="4709160"/>
-            <a:ext cx="10728655" cy="1371600"/>
+            <a:off x="4343400" y="2651760"/>
+            <a:ext cx="3474720" cy="3566160"/>
           </a:xfrm>
           <a:prstGeom prst="roundRect">
             <a:avLst/>
@@ -5342,9 +7991,9 @@
           <a:solidFill>
             <a:srgbClr val="FFFFFF"/>
           </a:solidFill>
-          <a:ln w="19050">
+          <a:ln w="12700">
             <a:solidFill>
-              <a:srgbClr val="0E121B"/>
+              <a:srgbClr val="E2E6EE"/>
             </a:solidFill>
           </a:ln>
         </p:spPr>
@@ -5363,11 +8012,37 @@
           </a:fontRef>
         </p:style>
         <p:txBody>
-          <a:bodyPr rtlCol="0" anchor="ctr" wrap="square" tIns="182880" lIns="365760" rIns="365760"/>
-          <a:lstStyle/>
-          <a:p>
-            <a:pPr algn="ctr">
-              <a:defRPr sz="1350" b="1">
+          <a:bodyPr rtlCol="0" anchor="ctr"/>
+          <a:lstStyle/>
+          <a:p>
+            <a:pPr algn="ctr"/>
+          </a:p>
+        </p:txBody>
+      </p:sp>
+      <p:sp>
+        <p:nvSpPr>
+          <p:cNvPr id="10" name="TextBox 9"/>
+          <p:cNvSpPr txBox="1"/>
+          <p:nvPr/>
+        </p:nvSpPr>
+        <p:spPr>
+          <a:xfrm>
+            <a:off x="4526280" y="2926080"/>
+            <a:ext cx="3108960" cy="3017520"/>
+          </a:xfrm>
+          <a:prstGeom prst="rect">
+            <a:avLst/>
+          </a:prstGeom>
+          <a:noFill/>
+        </p:spPr>
+        <p:txBody>
+          <a:bodyPr wrap="square">
+            <a:spAutoFit/>
+          </a:bodyPr>
+          <a:lstStyle/>
+          <a:p>
+            <a:pPr>
+              <a:defRPr sz="1300" b="1">
                 <a:solidFill>
                   <a:srgbClr val="1B1F2A"/>
                 </a:solidFill>
@@ -5375,7 +8050,120 @@
               </a:defRPr>
             </a:pPr>
             <a:r>
-              <a:t>¿Cuánto necesitás cobrar por tus productos y/o servicios para que tu propia economía + tu negocio funcione?</a:t>
+              <a:t>PRECIOS &amp; RENTABILIDAD</a:t>
+            </a:r>
+          </a:p>
+          <a:p>
+            <a:pPr>
+              <a:spcBef>
+                <a:spcPts val="1000"/>
+              </a:spcBef>
+              <a:defRPr sz="1200">
+                <a:solidFill>
+                  <a:srgbClr val="5A6473"/>
+                </a:solidFill>
+                <a:latin typeface="Montserrat"/>
+              </a:defRPr>
+            </a:pPr>
+            <a:r>
+              <a:t>Cobra por el valor y la transformación, con un margen saludable.</a:t>
+            </a:r>
+          </a:p>
+        </p:txBody>
+      </p:sp>
+      <p:sp>
+        <p:nvSpPr>
+          <p:cNvPr id="11" name="Rounded Rectangle 10"/>
+          <p:cNvSpPr/>
+          <p:nvPr/>
+        </p:nvSpPr>
+        <p:spPr>
+          <a:xfrm>
+            <a:off x="7955280" y="2651760"/>
+            <a:ext cx="3474720" cy="3566160"/>
+          </a:xfrm>
+          <a:prstGeom prst="roundRect">
+            <a:avLst/>
+          </a:prstGeom>
+          <a:solidFill>
+            <a:srgbClr val="FFFFFF"/>
+          </a:solidFill>
+          <a:ln w="12700">
+            <a:solidFill>
+              <a:srgbClr val="E2E6EE"/>
+            </a:solidFill>
+          </a:ln>
+        </p:spPr>
+        <p:style>
+          <a:lnRef idx="1">
+            <a:schemeClr val="accent1"/>
+          </a:lnRef>
+          <a:fillRef idx="3">
+            <a:schemeClr val="accent1"/>
+          </a:fillRef>
+          <a:effectRef idx="2">
+            <a:schemeClr val="accent1"/>
+          </a:effectRef>
+          <a:fontRef idx="minor">
+            <a:schemeClr val="lt1"/>
+          </a:fontRef>
+        </p:style>
+        <p:txBody>
+          <a:bodyPr rtlCol="0" anchor="ctr"/>
+          <a:lstStyle/>
+          <a:p>
+            <a:pPr algn="ctr"/>
+          </a:p>
+        </p:txBody>
+      </p:sp>
+      <p:sp>
+        <p:nvSpPr>
+          <p:cNvPr id="12" name="TextBox 11"/>
+          <p:cNvSpPr txBox="1"/>
+          <p:nvPr/>
+        </p:nvSpPr>
+        <p:spPr>
+          <a:xfrm>
+            <a:off x="8138160" y="2926080"/>
+            <a:ext cx="3108960" cy="3017520"/>
+          </a:xfrm>
+          <a:prstGeom prst="rect">
+            <a:avLst/>
+          </a:prstGeom>
+          <a:noFill/>
+        </p:spPr>
+        <p:txBody>
+          <a:bodyPr wrap="square">
+            <a:spAutoFit/>
+          </a:bodyPr>
+          <a:lstStyle/>
+          <a:p>
+            <a:pPr>
+              <a:defRPr sz="1300" b="1">
+                <a:solidFill>
+                  <a:srgbClr val="1B1F2A"/>
+                </a:solidFill>
+                <a:latin typeface="Montserrat"/>
+              </a:defRPr>
+            </a:pPr>
+            <a:r>
+              <a:t>FLUJO &amp; OBJETIVOS</a:t>
+            </a:r>
+          </a:p>
+          <a:p>
+            <a:pPr>
+              <a:spcBef>
+                <a:spcPts val="1000"/>
+              </a:spcBef>
+              <a:defRPr sz="1200">
+                <a:solidFill>
+                  <a:srgbClr val="5A6473"/>
+                </a:solidFill>
+                <a:latin typeface="Montserrat"/>
+              </a:defRPr>
+            </a:pPr>
+            <a:r>
+              <a:t>Monitorea su flujo de caja y define metas económicas precisas.</a:t>
             </a:r>
           </a:p>
         </p:txBody>
@@ -5413,7 +8201,7 @@
             <a:avLst/>
           </a:prstGeom>
           <a:solidFill>
-            <a:srgbClr val="0E121B"/>
+            <a:srgbClr val="F8F9FB"/>
           </a:solidFill>
           <a:ln>
             <a:noFill/>
@@ -5464,15 +8252,15 @@
           <a:lstStyle/>
           <a:p>
             <a:pPr>
-              <a:defRPr sz="1050" b="1">
-                <a:solidFill>
-                  <a:srgbClr val="D4AF37"/>
-                </a:solidFill>
-                <a:latin typeface="Montserrat"/>
-              </a:defRPr>
-            </a:pPr>
-            <a:r>
-              <a:t>LA FÓRMULA</a:t>
+              <a:defRPr sz="1000" b="1">
+                <a:solidFill>
+                  <a:srgbClr val="B4871E"/>
+                </a:solidFill>
+                <a:latin typeface="Montserrat"/>
+              </a:defRPr>
+            </a:pPr>
+            <a:r>
+              <a:t>PILAR 4 • MODO LÍDER</a:t>
             </a:r>
           </a:p>
         </p:txBody>
@@ -5502,13 +8290,13 @@
             <a:pPr>
               <a:defRPr sz="2100" b="1">
                 <a:solidFill>
-                  <a:srgbClr val="F5F5F7"/>
-                </a:solidFill>
-                <a:latin typeface="Montserrat"/>
-              </a:defRPr>
-            </a:pPr>
-            <a:r>
-              <a:t>EMPRENDER CONSCIENTEMENTE = PROPÓSITO + IDENTIDAD + MENTALIDAD + ACCIÓN CON ESTRATEGIA = IMPACTO + DINERO QUE FLUYE HACIA TU NEGOCIO</a:t>
+                  <a:srgbClr val="1B1F2A"/>
+                </a:solidFill>
+                <a:latin typeface="Montserrat"/>
+              </a:defRPr>
+            </a:pPr>
+            <a:r>
+              <a:t>Pilar 4: Vende y Comunica con Valor</a:t>
             </a:r>
           </a:p>
         </p:txBody>
@@ -5521,18 +8309,18 @@
         </p:nvSpPr>
         <p:spPr>
           <a:xfrm>
-            <a:off x="731520" y="1691640"/>
-            <a:ext cx="5212080" cy="960120"/>
+            <a:off x="731520" y="1554480"/>
+            <a:ext cx="5212080" cy="4663440"/>
           </a:xfrm>
           <a:prstGeom prst="roundRect">
             <a:avLst/>
           </a:prstGeom>
           <a:solidFill>
-            <a:srgbClr val="161A25"/>
+            <a:srgbClr val="FFF3F5"/>
           </a:solidFill>
-          <a:ln>
+          <a:ln w="12700">
             <a:solidFill>
-              <a:srgbClr val="3C465A"/>
+              <a:srgbClr val="E94560"/>
             </a:solidFill>
           </a:ln>
         </p:spPr>
@@ -5551,52 +8339,97 @@
           </a:fontRef>
         </p:style>
         <p:txBody>
-          <a:bodyPr rtlCol="0" anchor="ctr" wrap="square" tIns="137160" lIns="274320"/>
-          <a:lstStyle/>
-          <a:p>
-            <a:pPr algn="ctr">
+          <a:bodyPr rtlCol="0" anchor="ctr"/>
+          <a:lstStyle/>
+          <a:p>
+            <a:pPr algn="ctr"/>
+          </a:p>
+        </p:txBody>
+      </p:sp>
+      <p:sp>
+        <p:nvSpPr>
+          <p:cNvPr id="6" name="TextBox 5"/>
+          <p:cNvSpPr txBox="1"/>
+          <p:nvPr/>
+        </p:nvSpPr>
+        <p:spPr>
+          <a:xfrm>
+            <a:off x="1005840" y="1737360"/>
+            <a:ext cx="4663440" cy="4297680"/>
+          </a:xfrm>
+          <a:prstGeom prst="rect">
+            <a:avLst/>
+          </a:prstGeom>
+          <a:noFill/>
+        </p:spPr>
+        <p:txBody>
+          <a:bodyPr wrap="square">
+            <a:spAutoFit/>
+          </a:bodyPr>
+          <a:lstStyle/>
+          <a:p>
+            <a:pPr>
               <a:defRPr sz="1300" b="1">
                 <a:solidFill>
-                  <a:srgbClr val="D4AF37"/>
-                </a:solidFill>
-                <a:latin typeface="Montserrat"/>
-              </a:defRPr>
-            </a:pPr>
-            <a:r>
-              <a:t>• Propósito: </a:t>
-            </a:r>
-            <a:r>
-              <a:rPr sz="1200" b="0">
-                <a:solidFill>
-                  <a:srgbClr val="F5F5F7"/>
-                </a:solidFill>
-                <a:latin typeface="Montserrat"/>
-              </a:rPr>
-              <a:t>¿para qué?</a:t>
-            </a:r>
-          </a:p>
-        </p:txBody>
-      </p:sp>
-      <p:sp>
-        <p:nvSpPr>
-          <p:cNvPr id="6" name="Rounded Rectangle 5"/>
+                  <a:srgbClr val="E94560"/>
+                </a:solidFill>
+                <a:latin typeface="Montserrat"/>
+              </a:defRPr>
+            </a:pPr>
+            <a:r>
+              <a:t>LO QUE NO ES VENDER</a:t>
+            </a:r>
+          </a:p>
+          <a:p>
+            <a:pPr>
+              <a:spcBef>
+                <a:spcPts val="1400"/>
+              </a:spcBef>
+              <a:defRPr sz="1300">
+                <a:solidFill>
+                  <a:srgbClr val="1B1F2A"/>
+                </a:solidFill>
+                <a:latin typeface="Montserrat"/>
+              </a:defRPr>
+            </a:pPr>
+            <a:r>
+              <a:t>❌ Vender NO es perseguir personas.</a:t>
+            </a:r>
+            <a:br/>
+            <a:r>
+              <a:t>❌ NO es convencer a quien no necesita tu servicio.</a:t>
+            </a:r>
+            <a:br/>
+            <a:r>
+              <a:t>❌ NO es manipular ni rebajar tus precios por inseguridad.</a:t>
+            </a:r>
+            <a:br/>
+            <a:r>
+              <a:t>❌ NO es rogar por una respuesta.</a:t>
+            </a:r>
+          </a:p>
+        </p:txBody>
+      </p:sp>
+      <p:sp>
+        <p:nvSpPr>
+          <p:cNvPr id="7" name="Rounded Rectangle 6"/>
           <p:cNvSpPr/>
           <p:nvPr/>
         </p:nvSpPr>
         <p:spPr>
           <a:xfrm>
-            <a:off x="731520" y="2834640"/>
-            <a:ext cx="5212080" cy="960120"/>
+            <a:off x="6217920" y="1554480"/>
+            <a:ext cx="5212080" cy="4663440"/>
           </a:xfrm>
           <a:prstGeom prst="roundRect">
             <a:avLst/>
           </a:prstGeom>
           <a:solidFill>
-            <a:srgbClr val="161A25"/>
+            <a:srgbClr val="FEF9EB"/>
           </a:solidFill>
-          <a:ln>
+          <a:ln w="12700">
             <a:solidFill>
-              <a:srgbClr val="3C465A"/>
+              <a:srgbClr val="D4AF37"/>
             </a:solidFill>
           </a:ln>
         </p:spPr>
@@ -5615,348 +8448,73 @@
           </a:fontRef>
         </p:style>
         <p:txBody>
-          <a:bodyPr rtlCol="0" anchor="ctr" wrap="square" tIns="137160" lIns="274320"/>
-          <a:lstStyle/>
-          <a:p>
-            <a:pPr algn="ctr">
+          <a:bodyPr rtlCol="0" anchor="ctr"/>
+          <a:lstStyle/>
+          <a:p>
+            <a:pPr algn="ctr"/>
+          </a:p>
+        </p:txBody>
+      </p:sp>
+      <p:sp>
+        <p:nvSpPr>
+          <p:cNvPr id="8" name="TextBox 7"/>
+          <p:cNvSpPr txBox="1"/>
+          <p:nvPr/>
+        </p:nvSpPr>
+        <p:spPr>
+          <a:xfrm>
+            <a:off x="6492240" y="1737360"/>
+            <a:ext cx="4663440" cy="4297680"/>
+          </a:xfrm>
+          <a:prstGeom prst="rect">
+            <a:avLst/>
+          </a:prstGeom>
+          <a:noFill/>
+        </p:spPr>
+        <p:txBody>
+          <a:bodyPr wrap="square">
+            <a:spAutoFit/>
+          </a:bodyPr>
+          <a:lstStyle/>
+          <a:p>
+            <a:pPr>
               <a:defRPr sz="1300" b="1">
                 <a:solidFill>
-                  <a:srgbClr val="D4AF37"/>
-                </a:solidFill>
-                <a:latin typeface="Montserrat"/>
-              </a:defRPr>
-            </a:pPr>
-            <a:r>
-              <a:t>• Identidad: </a:t>
-            </a:r>
-            <a:r>
-              <a:rPr sz="1200" b="0">
-                <a:solidFill>
-                  <a:srgbClr val="F5F5F7"/>
-                </a:solidFill>
-                <a:latin typeface="Montserrat"/>
-              </a:rPr>
-              <a:t>¿quién soy y qué quiero construir?</a:t>
-            </a:r>
-          </a:p>
-        </p:txBody>
-      </p:sp>
-      <p:sp>
-        <p:nvSpPr>
-          <p:cNvPr id="7" name="Rounded Rectangle 6"/>
-          <p:cNvSpPr/>
-          <p:nvPr/>
-        </p:nvSpPr>
-        <p:spPr>
-          <a:xfrm>
-            <a:off x="731520" y="3977640"/>
-            <a:ext cx="5212080" cy="960120"/>
-          </a:xfrm>
-          <a:prstGeom prst="roundRect">
-            <a:avLst/>
-          </a:prstGeom>
-          <a:solidFill>
-            <a:srgbClr val="161A25"/>
-          </a:solidFill>
-          <a:ln>
-            <a:solidFill>
-              <a:srgbClr val="3C465A"/>
-            </a:solidFill>
-          </a:ln>
-        </p:spPr>
-        <p:style>
-          <a:lnRef idx="1">
-            <a:schemeClr val="accent1"/>
-          </a:lnRef>
-          <a:fillRef idx="3">
-            <a:schemeClr val="accent1"/>
-          </a:fillRef>
-          <a:effectRef idx="2">
-            <a:schemeClr val="accent1"/>
-          </a:effectRef>
-          <a:fontRef idx="minor">
-            <a:schemeClr val="lt1"/>
-          </a:fontRef>
-        </p:style>
-        <p:txBody>
-          <a:bodyPr rtlCol="0" anchor="ctr" wrap="square" tIns="137160" lIns="274320"/>
-          <a:lstStyle/>
-          <a:p>
-            <a:pPr algn="ctr">
-              <a:defRPr sz="1300" b="1">
-                <a:solidFill>
-                  <a:srgbClr val="D4AF37"/>
-                </a:solidFill>
-                <a:latin typeface="Montserrat"/>
-              </a:defRPr>
-            </a:pPr>
-            <a:r>
-              <a:t>• Mentalidad: </a:t>
-            </a:r>
-            <a:r>
-              <a:rPr sz="1200" b="0">
-                <a:solidFill>
-                  <a:srgbClr val="F5F5F7"/>
-                </a:solidFill>
-                <a:latin typeface="Montserrat"/>
-              </a:rPr>
-              <a:t>¿qué necesito transformar?</a:t>
-            </a:r>
-          </a:p>
-        </p:txBody>
-      </p:sp>
-      <p:sp>
-        <p:nvSpPr>
-          <p:cNvPr id="8" name="Rounded Rectangle 7"/>
-          <p:cNvSpPr/>
-          <p:nvPr/>
-        </p:nvSpPr>
-        <p:spPr>
-          <a:xfrm>
-            <a:off x="731520" y="5120640"/>
-            <a:ext cx="5212080" cy="960120"/>
-          </a:xfrm>
-          <a:prstGeom prst="roundRect">
-            <a:avLst/>
-          </a:prstGeom>
-          <a:solidFill>
-            <a:srgbClr val="161A25"/>
-          </a:solidFill>
-          <a:ln>
-            <a:solidFill>
-              <a:srgbClr val="3C465A"/>
-            </a:solidFill>
-          </a:ln>
-        </p:spPr>
-        <p:style>
-          <a:lnRef idx="1">
-            <a:schemeClr val="accent1"/>
-          </a:lnRef>
-          <a:fillRef idx="3">
-            <a:schemeClr val="accent1"/>
-          </a:fillRef>
-          <a:effectRef idx="2">
-            <a:schemeClr val="accent1"/>
-          </a:effectRef>
-          <a:fontRef idx="minor">
-            <a:schemeClr val="lt1"/>
-          </a:fontRef>
-        </p:style>
-        <p:txBody>
-          <a:bodyPr rtlCol="0" anchor="ctr" wrap="square" tIns="137160" lIns="274320"/>
-          <a:lstStyle/>
-          <a:p>
-            <a:pPr algn="ctr">
-              <a:defRPr sz="1300" b="1">
-                <a:solidFill>
-                  <a:srgbClr val="D4AF37"/>
-                </a:solidFill>
-                <a:latin typeface="Montserrat"/>
-              </a:defRPr>
-            </a:pPr>
-            <a:r>
-              <a:t>• Acción: </a:t>
-            </a:r>
-            <a:r>
-              <a:rPr sz="1200" b="0">
-                <a:solidFill>
-                  <a:srgbClr val="F5F5F7"/>
-                </a:solidFill>
-                <a:latin typeface="Montserrat"/>
-              </a:rPr>
-              <a:t>¿qué hago?</a:t>
-            </a:r>
-          </a:p>
-        </p:txBody>
-      </p:sp>
-      <p:sp>
-        <p:nvSpPr>
-          <p:cNvPr id="9" name="Rounded Rectangle 8"/>
-          <p:cNvSpPr/>
-          <p:nvPr/>
-        </p:nvSpPr>
-        <p:spPr>
-          <a:xfrm>
-            <a:off x="6248095" y="1691640"/>
-            <a:ext cx="5212080" cy="960120"/>
-          </a:xfrm>
-          <a:prstGeom prst="roundRect">
-            <a:avLst/>
-          </a:prstGeom>
-          <a:solidFill>
-            <a:srgbClr val="161A25"/>
-          </a:solidFill>
-          <a:ln>
-            <a:solidFill>
-              <a:srgbClr val="3C465A"/>
-            </a:solidFill>
-          </a:ln>
-        </p:spPr>
-        <p:style>
-          <a:lnRef idx="1">
-            <a:schemeClr val="accent1"/>
-          </a:lnRef>
-          <a:fillRef idx="3">
-            <a:schemeClr val="accent1"/>
-          </a:fillRef>
-          <a:effectRef idx="2">
-            <a:schemeClr val="accent1"/>
-          </a:effectRef>
-          <a:fontRef idx="minor">
-            <a:schemeClr val="lt1"/>
-          </a:fontRef>
-        </p:style>
-        <p:txBody>
-          <a:bodyPr rtlCol="0" anchor="ctr" wrap="square" tIns="137160" lIns="274320"/>
-          <a:lstStyle/>
-          <a:p>
-            <a:pPr algn="ctr">
-              <a:defRPr sz="1300" b="1">
-                <a:solidFill>
-                  <a:srgbClr val="D4AF37"/>
-                </a:solidFill>
-                <a:latin typeface="Montserrat"/>
-              </a:defRPr>
-            </a:pPr>
-            <a:r>
-              <a:t>• Estrategia: </a:t>
-            </a:r>
-            <a:r>
-              <a:rPr sz="1200" b="0">
-                <a:solidFill>
-                  <a:srgbClr val="F5F5F7"/>
-                </a:solidFill>
-                <a:latin typeface="Montserrat"/>
-              </a:rPr>
-              <a:t>¿cómo lo hago inteligentemente?</a:t>
-            </a:r>
-          </a:p>
-        </p:txBody>
-      </p:sp>
-      <p:sp>
-        <p:nvSpPr>
-          <p:cNvPr id="10" name="Rounded Rectangle 9"/>
-          <p:cNvSpPr/>
-          <p:nvPr/>
-        </p:nvSpPr>
-        <p:spPr>
-          <a:xfrm>
-            <a:off x="6248095" y="2834640"/>
-            <a:ext cx="5212080" cy="960120"/>
-          </a:xfrm>
-          <a:prstGeom prst="roundRect">
-            <a:avLst/>
-          </a:prstGeom>
-          <a:solidFill>
-            <a:srgbClr val="161A25"/>
-          </a:solidFill>
-          <a:ln>
-            <a:solidFill>
-              <a:srgbClr val="3C465A"/>
-            </a:solidFill>
-          </a:ln>
-        </p:spPr>
-        <p:style>
-          <a:lnRef idx="1">
-            <a:schemeClr val="accent1"/>
-          </a:lnRef>
-          <a:fillRef idx="3">
-            <a:schemeClr val="accent1"/>
-          </a:fillRef>
-          <a:effectRef idx="2">
-            <a:schemeClr val="accent1"/>
-          </a:effectRef>
-          <a:fontRef idx="minor">
-            <a:schemeClr val="lt1"/>
-          </a:fontRef>
-        </p:style>
-        <p:txBody>
-          <a:bodyPr rtlCol="0" anchor="ctr" wrap="square" tIns="137160" lIns="274320"/>
-          <a:lstStyle/>
-          <a:p>
-            <a:pPr algn="ctr">
-              <a:defRPr sz="1300" b="1">
-                <a:solidFill>
-                  <a:srgbClr val="D4AF37"/>
-                </a:solidFill>
-                <a:latin typeface="Montserrat"/>
-              </a:defRPr>
-            </a:pPr>
-            <a:r>
-              <a:t>• Impacto: </a:t>
-            </a:r>
-            <a:r>
-              <a:rPr sz="1200" b="0">
-                <a:solidFill>
-                  <a:srgbClr val="F5F5F7"/>
-                </a:solidFill>
-                <a:latin typeface="Montserrat"/>
-              </a:rPr>
-              <a:t>¿qué genero?</a:t>
-            </a:r>
-          </a:p>
-        </p:txBody>
-      </p:sp>
-      <p:sp>
-        <p:nvSpPr>
-          <p:cNvPr id="11" name="Rounded Rectangle 10"/>
-          <p:cNvSpPr/>
-          <p:nvPr/>
-        </p:nvSpPr>
-        <p:spPr>
-          <a:xfrm>
-            <a:off x="6248095" y="3977640"/>
-            <a:ext cx="5212080" cy="960120"/>
-          </a:xfrm>
-          <a:prstGeom prst="roundRect">
-            <a:avLst/>
-          </a:prstGeom>
-          <a:solidFill>
-            <a:srgbClr val="161A25"/>
-          </a:solidFill>
-          <a:ln>
-            <a:solidFill>
-              <a:srgbClr val="3C465A"/>
-            </a:solidFill>
-          </a:ln>
-        </p:spPr>
-        <p:style>
-          <a:lnRef idx="1">
-            <a:schemeClr val="accent1"/>
-          </a:lnRef>
-          <a:fillRef idx="3">
-            <a:schemeClr val="accent1"/>
-          </a:fillRef>
-          <a:effectRef idx="2">
-            <a:schemeClr val="accent1"/>
-          </a:effectRef>
-          <a:fontRef idx="minor">
-            <a:schemeClr val="lt1"/>
-          </a:fontRef>
-        </p:style>
-        <p:txBody>
-          <a:bodyPr rtlCol="0" anchor="ctr" wrap="square" tIns="137160" lIns="274320"/>
-          <a:lstStyle/>
-          <a:p>
-            <a:pPr algn="ctr">
-              <a:defRPr sz="1300" b="1">
-                <a:solidFill>
-                  <a:srgbClr val="D4AF37"/>
-                </a:solidFill>
-                <a:latin typeface="Montserrat"/>
-              </a:defRPr>
-            </a:pPr>
-            <a:r>
-              <a:t>• Dinero: </a:t>
-            </a:r>
-            <a:r>
-              <a:rPr sz="1200" b="0">
-                <a:solidFill>
-                  <a:srgbClr val="F5F5F7"/>
-                </a:solidFill>
-                <a:latin typeface="Montserrat"/>
-              </a:rPr>
-              <a:t>¿cómo genero dinero para que mi sustento personal sea sostenible?</a:t>
+                  <a:srgbClr val="B4871E"/>
+                </a:solidFill>
+                <a:latin typeface="Montserrat"/>
+              </a:defRPr>
+            </a:pPr>
+            <a:r>
+              <a:t>LA VENTA CONSCIENTE EN MODO LÍDER</a:t>
+            </a:r>
+          </a:p>
+          <a:p>
+            <a:pPr>
+              <a:spcBef>
+                <a:spcPts val="1400"/>
+              </a:spcBef>
+              <a:defRPr sz="1300">
+                <a:solidFill>
+                  <a:srgbClr val="1B1F2A"/>
+                </a:solidFill>
+                <a:latin typeface="Montserrat"/>
+              </a:defRPr>
+            </a:pPr>
+            <a:r>
+              <a:t>✨ Comunicar con total nitidez el valor de lo que ofreces.</a:t>
+            </a:r>
+            <a:br/>
+            <a:r>
+              <a:t>✨ Conectar con la necesidad real del cliente calificado.</a:t>
+            </a:r>
+            <a:br/>
+            <a:r>
+              <a:t>✨ Posicionarte como la solución experta y de confianza.</a:t>
+            </a:r>
+            <a:br/>
+            <a:r>
+              <a:t>✨ Acompañar al cliente para que tome la mejor decisión.</a:t>
             </a:r>
           </a:p>
         </p:txBody>
@@ -6045,7 +8603,7 @@
           <a:lstStyle/>
           <a:p>
             <a:pPr>
-              <a:defRPr sz="1050" b="1">
+              <a:defRPr sz="1000" b="1">
                 <a:solidFill>
                   <a:srgbClr val="B4871E"/>
                 </a:solidFill>
@@ -6053,7 +8611,7 @@
               </a:defRPr>
             </a:pPr>
             <a:r>
-              <a:t>CAPÍTULO 1 • EMPRENDER CONSCIENTEMENTE</a:t>
+              <a:t>PILAR 5 • MODO LÍDER</a:t>
             </a:r>
           </a:p>
         </p:txBody>
@@ -6089,7 +8647,7 @@
               </a:defRPr>
             </a:pPr>
             <a:r>
-              <a:t>Conciencia Empresarial &amp; Marca Personal</a:t>
+              <a:t>Pilar 5: Decide y Ejecuta (Vencer la Parálisis)</a:t>
             </a:r>
           </a:p>
         </p:txBody>
@@ -6102,18 +8660,18 @@
         </p:nvSpPr>
         <p:spPr>
           <a:xfrm>
-            <a:off x="731520" y="1600200"/>
-            <a:ext cx="10728655" cy="2926080"/>
+            <a:off x="731520" y="1463040"/>
+            <a:ext cx="10728655" cy="1005840"/>
           </a:xfrm>
           <a:prstGeom prst="roundRect">
             <a:avLst/>
           </a:prstGeom>
           <a:solidFill>
-            <a:srgbClr val="FFFFFF"/>
+            <a:srgbClr val="FEF9EB"/>
           </a:solidFill>
-          <a:ln>
+          <a:ln w="12700">
             <a:solidFill>
-              <a:srgbClr val="E2E6EE"/>
+              <a:srgbClr val="D4AF37"/>
             </a:solidFill>
           </a:ln>
         </p:spPr>
@@ -6132,57 +8690,69 @@
           </a:fontRef>
         </p:style>
         <p:txBody>
-          <a:bodyPr rtlCol="0" anchor="ctr" wrap="square" tIns="274320" lIns="365760" rIns="365760"/>
-          <a:lstStyle/>
-          <a:p>
-            <a:pPr algn="ctr">
-              <a:defRPr sz="1250">
-                <a:solidFill>
-                  <a:srgbClr val="1B1F2A"/>
-                </a:solidFill>
-                <a:latin typeface="Montserrat"/>
-              </a:defRPr>
-            </a:pPr>
-            <a:r>
-              <a:t>Un emprendedor consciente sabe quién es, tiene una dirección (propósito) y cada día toma decisiones y acciona en función de sus valores y transformando su mentalidad hacia  lo que necesita hacer para llegar un día a la vez hacia crear y sostener un negocio de impacto que le permita vivir con el estilo de vida que desea.</a:t>
-            </a:r>
-          </a:p>
-          <a:p>
-            <a:br/>
-            <a:pPr>
-              <a:defRPr sz="1250">
-                <a:solidFill>
-                  <a:srgbClr val="1B1F2A"/>
-                </a:solidFill>
-                <a:latin typeface="Montserrat"/>
-              </a:defRPr>
-            </a:pPr>
-            <a:r>
-              <a:t>La conciencia empresarial es aprender a tomar mejores decisiones con los elementos que se tienen disponibles pero sin perder de vista los valores los limites la conexion con el cliente y lo que deseo para mi y mi negocio.</a:t>
-            </a:r>
-          </a:p>
-        </p:txBody>
-      </p:sp>
-      <p:sp>
-        <p:nvSpPr>
-          <p:cNvPr id="6" name="Rounded Rectangle 5"/>
+          <a:bodyPr rtlCol="0" anchor="ctr"/>
+          <a:lstStyle/>
+          <a:p>
+            <a:pPr algn="ctr"/>
+          </a:p>
+        </p:txBody>
+      </p:sp>
+      <p:sp>
+        <p:nvSpPr>
+          <p:cNvPr id="6" name="TextBox 5"/>
+          <p:cNvSpPr txBox="1"/>
+          <p:nvPr/>
+        </p:nvSpPr>
+        <p:spPr>
+          <a:xfrm>
+            <a:off x="1005840" y="1600200"/>
+            <a:ext cx="10149840" cy="731520"/>
+          </a:xfrm>
+          <a:prstGeom prst="rect">
+            <a:avLst/>
+          </a:prstGeom>
+          <a:noFill/>
+        </p:spPr>
+        <p:txBody>
+          <a:bodyPr wrap="none">
+            <a:spAutoFit/>
+          </a:bodyPr>
+          <a:lstStyle/>
+          <a:p>
+            <a:pPr>
+              <a:defRPr sz="1400" b="1">
+                <a:solidFill>
+                  <a:srgbClr val="B4871E"/>
+                </a:solidFill>
+                <a:latin typeface="Montserrat"/>
+              </a:defRPr>
+            </a:pPr>
+            <a:r>
+              <a:t>“La consciencia sin acción se convierte en reflexión permanente. No esperes tener todo perfecto para avanzar.”</a:t>
+            </a:r>
+          </a:p>
+        </p:txBody>
+      </p:sp>
+      <p:sp>
+        <p:nvSpPr>
+          <p:cNvPr id="7" name="Rounded Rectangle 6"/>
           <p:cNvSpPr/>
           <p:nvPr/>
         </p:nvSpPr>
         <p:spPr>
           <a:xfrm>
-            <a:off x="731520" y="4709160"/>
-            <a:ext cx="10728655" cy="1463040"/>
+            <a:off x="731520" y="2651760"/>
+            <a:ext cx="2011680" cy="3566160"/>
           </a:xfrm>
           <a:prstGeom prst="roundRect">
             <a:avLst/>
           </a:prstGeom>
           <a:solidFill>
-            <a:srgbClr val="FEF9EB"/>
+            <a:srgbClr val="FFFFFF"/>
           </a:solidFill>
-          <a:ln w="19050">
+          <a:ln w="12700">
             <a:solidFill>
-              <a:srgbClr val="D4AF37"/>
+              <a:srgbClr val="E2E6EE"/>
             </a:solidFill>
           </a:ln>
         </p:spPr>
@@ -6201,23 +8771,449 @@
           </a:fontRef>
         </p:style>
         <p:txBody>
-          <a:bodyPr rtlCol="0" anchor="ctr" wrap="square" tIns="320040" lIns="365760" rIns="365760"/>
-          <a:lstStyle/>
-          <a:p>
-            <a:pPr algn="ctr">
-              <a:defRPr sz="1400" b="1">
-                <a:solidFill>
-                  <a:srgbClr val="B4871E"/>
-                </a:solidFill>
-                <a:latin typeface="Montserrat"/>
-              </a:defRPr>
-            </a:pPr>
-            <a:r>
-              <a:t>Estas decisiones puestas en acción a diario crean una</a:t>
-            </a:r>
-            <a:br/>
-            <a:r>
-              <a:t>MARCA PERSONAL QUE SE ENTIENDE Y FUNCIONA PARA GENERAR DINERO</a:t>
+          <a:bodyPr rtlCol="0" anchor="ctr"/>
+          <a:lstStyle/>
+          <a:p>
+            <a:pPr algn="ctr"/>
+          </a:p>
+        </p:txBody>
+      </p:sp>
+      <p:sp>
+        <p:nvSpPr>
+          <p:cNvPr id="8" name="TextBox 7"/>
+          <p:cNvSpPr txBox="1"/>
+          <p:nvPr/>
+        </p:nvSpPr>
+        <p:spPr>
+          <a:xfrm>
+            <a:off x="822960" y="3017520"/>
+            <a:ext cx="1828800" cy="2743200"/>
+          </a:xfrm>
+          <a:prstGeom prst="rect">
+            <a:avLst/>
+          </a:prstGeom>
+          <a:noFill/>
+        </p:spPr>
+        <p:txBody>
+          <a:bodyPr wrap="square">
+            <a:spAutoFit/>
+          </a:bodyPr>
+          <a:lstStyle/>
+          <a:p>
+            <a:pPr>
+              <a:defRPr sz="1200" b="1">
+                <a:solidFill>
+                  <a:srgbClr val="1B1F2A"/>
+                </a:solidFill>
+                <a:latin typeface="Montserrat"/>
+              </a:defRPr>
+            </a:pPr>
+            <a:r>
+              <a:t>1. PRIORIZA</a:t>
+            </a:r>
+          </a:p>
+          <a:p>
+            <a:pPr>
+              <a:spcBef>
+                <a:spcPts val="800"/>
+              </a:spcBef>
+              <a:defRPr sz="1100">
+                <a:solidFill>
+                  <a:srgbClr val="5A6473"/>
+                </a:solidFill>
+                <a:latin typeface="Montserrat"/>
+              </a:defRPr>
+            </a:pPr>
+            <a:r>
+              <a:t>Elige qué mueve la aguja hoy.</a:t>
+            </a:r>
+          </a:p>
+        </p:txBody>
+      </p:sp>
+      <p:sp>
+        <p:nvSpPr>
+          <p:cNvPr id="9" name="Rounded Rectangle 8"/>
+          <p:cNvSpPr/>
+          <p:nvPr/>
+        </p:nvSpPr>
+        <p:spPr>
+          <a:xfrm>
+            <a:off x="2907791" y="2651760"/>
+            <a:ext cx="2011680" cy="3566160"/>
+          </a:xfrm>
+          <a:prstGeom prst="roundRect">
+            <a:avLst/>
+          </a:prstGeom>
+          <a:solidFill>
+            <a:srgbClr val="FFFFFF"/>
+          </a:solidFill>
+          <a:ln w="12700">
+            <a:solidFill>
+              <a:srgbClr val="E2E6EE"/>
+            </a:solidFill>
+          </a:ln>
+        </p:spPr>
+        <p:style>
+          <a:lnRef idx="1">
+            <a:schemeClr val="accent1"/>
+          </a:lnRef>
+          <a:fillRef idx="3">
+            <a:schemeClr val="accent1"/>
+          </a:fillRef>
+          <a:effectRef idx="2">
+            <a:schemeClr val="accent1"/>
+          </a:effectRef>
+          <a:fontRef idx="minor">
+            <a:schemeClr val="lt1"/>
+          </a:fontRef>
+        </p:style>
+        <p:txBody>
+          <a:bodyPr rtlCol="0" anchor="ctr"/>
+          <a:lstStyle/>
+          <a:p>
+            <a:pPr algn="ctr"/>
+          </a:p>
+        </p:txBody>
+      </p:sp>
+      <p:sp>
+        <p:nvSpPr>
+          <p:cNvPr id="10" name="TextBox 9"/>
+          <p:cNvSpPr txBox="1"/>
+          <p:nvPr/>
+        </p:nvSpPr>
+        <p:spPr>
+          <a:xfrm>
+            <a:off x="2999231" y="3017520"/>
+            <a:ext cx="1828800" cy="2743200"/>
+          </a:xfrm>
+          <a:prstGeom prst="rect">
+            <a:avLst/>
+          </a:prstGeom>
+          <a:noFill/>
+        </p:spPr>
+        <p:txBody>
+          <a:bodyPr wrap="square">
+            <a:spAutoFit/>
+          </a:bodyPr>
+          <a:lstStyle/>
+          <a:p>
+            <a:pPr>
+              <a:defRPr sz="1200" b="1">
+                <a:solidFill>
+                  <a:srgbClr val="1B1F2A"/>
+                </a:solidFill>
+                <a:latin typeface="Montserrat"/>
+              </a:defRPr>
+            </a:pPr>
+            <a:r>
+              <a:t>2. PRUEBA</a:t>
+            </a:r>
+          </a:p>
+          <a:p>
+            <a:pPr>
+              <a:spcBef>
+                <a:spcPts val="800"/>
+              </a:spcBef>
+              <a:defRPr sz="1100">
+                <a:solidFill>
+                  <a:srgbClr val="5A6473"/>
+                </a:solidFill>
+                <a:latin typeface="Montserrat"/>
+              </a:defRPr>
+            </a:pPr>
+            <a:r>
+              <a:t>Lanza sin esperar perfección.</a:t>
+            </a:r>
+          </a:p>
+        </p:txBody>
+      </p:sp>
+      <p:sp>
+        <p:nvSpPr>
+          <p:cNvPr id="11" name="Rounded Rectangle 10"/>
+          <p:cNvSpPr/>
+          <p:nvPr/>
+        </p:nvSpPr>
+        <p:spPr>
+          <a:xfrm>
+            <a:off x="5084064" y="2651760"/>
+            <a:ext cx="2011680" cy="3566160"/>
+          </a:xfrm>
+          <a:prstGeom prst="roundRect">
+            <a:avLst/>
+          </a:prstGeom>
+          <a:solidFill>
+            <a:srgbClr val="FFFFFF"/>
+          </a:solidFill>
+          <a:ln w="12700">
+            <a:solidFill>
+              <a:srgbClr val="E2E6EE"/>
+            </a:solidFill>
+          </a:ln>
+        </p:spPr>
+        <p:style>
+          <a:lnRef idx="1">
+            <a:schemeClr val="accent1"/>
+          </a:lnRef>
+          <a:fillRef idx="3">
+            <a:schemeClr val="accent1"/>
+          </a:fillRef>
+          <a:effectRef idx="2">
+            <a:schemeClr val="accent1"/>
+          </a:effectRef>
+          <a:fontRef idx="minor">
+            <a:schemeClr val="lt1"/>
+          </a:fontRef>
+        </p:style>
+        <p:txBody>
+          <a:bodyPr rtlCol="0" anchor="ctr"/>
+          <a:lstStyle/>
+          <a:p>
+            <a:pPr algn="ctr"/>
+          </a:p>
+        </p:txBody>
+      </p:sp>
+      <p:sp>
+        <p:nvSpPr>
+          <p:cNvPr id="12" name="TextBox 11"/>
+          <p:cNvSpPr txBox="1"/>
+          <p:nvPr/>
+        </p:nvSpPr>
+        <p:spPr>
+          <a:xfrm>
+            <a:off x="5175504" y="3017520"/>
+            <a:ext cx="1828800" cy="2743200"/>
+          </a:xfrm>
+          <a:prstGeom prst="rect">
+            <a:avLst/>
+          </a:prstGeom>
+          <a:noFill/>
+        </p:spPr>
+        <p:txBody>
+          <a:bodyPr wrap="square">
+            <a:spAutoFit/>
+          </a:bodyPr>
+          <a:lstStyle/>
+          <a:p>
+            <a:pPr>
+              <a:defRPr sz="1200" b="1">
+                <a:solidFill>
+                  <a:srgbClr val="1B1F2A"/>
+                </a:solidFill>
+                <a:latin typeface="Montserrat"/>
+              </a:defRPr>
+            </a:pPr>
+            <a:r>
+              <a:t>3. MIDE</a:t>
+            </a:r>
+          </a:p>
+          <a:p>
+            <a:pPr>
+              <a:spcBef>
+                <a:spcPts val="800"/>
+              </a:spcBef>
+              <a:defRPr sz="1100">
+                <a:solidFill>
+                  <a:srgbClr val="5A6473"/>
+                </a:solidFill>
+                <a:latin typeface="Montserrat"/>
+              </a:defRPr>
+            </a:pPr>
+            <a:r>
+              <a:t>Evalúa con datos y hechos.</a:t>
+            </a:r>
+          </a:p>
+        </p:txBody>
+      </p:sp>
+      <p:sp>
+        <p:nvSpPr>
+          <p:cNvPr id="13" name="Rounded Rectangle 12"/>
+          <p:cNvSpPr/>
+          <p:nvPr/>
+        </p:nvSpPr>
+        <p:spPr>
+          <a:xfrm>
+            <a:off x="7260336" y="2651760"/>
+            <a:ext cx="2011680" cy="3566160"/>
+          </a:xfrm>
+          <a:prstGeom prst="roundRect">
+            <a:avLst/>
+          </a:prstGeom>
+          <a:solidFill>
+            <a:srgbClr val="FFFFFF"/>
+          </a:solidFill>
+          <a:ln w="12700">
+            <a:solidFill>
+              <a:srgbClr val="E2E6EE"/>
+            </a:solidFill>
+          </a:ln>
+        </p:spPr>
+        <p:style>
+          <a:lnRef idx="1">
+            <a:schemeClr val="accent1"/>
+          </a:lnRef>
+          <a:fillRef idx="3">
+            <a:schemeClr val="accent1"/>
+          </a:fillRef>
+          <a:effectRef idx="2">
+            <a:schemeClr val="accent1"/>
+          </a:effectRef>
+          <a:fontRef idx="minor">
+            <a:schemeClr val="lt1"/>
+          </a:fontRef>
+        </p:style>
+        <p:txBody>
+          <a:bodyPr rtlCol="0" anchor="ctr"/>
+          <a:lstStyle/>
+          <a:p>
+            <a:pPr algn="ctr"/>
+          </a:p>
+        </p:txBody>
+      </p:sp>
+      <p:sp>
+        <p:nvSpPr>
+          <p:cNvPr id="14" name="TextBox 13"/>
+          <p:cNvSpPr txBox="1"/>
+          <p:nvPr/>
+        </p:nvSpPr>
+        <p:spPr>
+          <a:xfrm>
+            <a:off x="7351776" y="3017520"/>
+            <a:ext cx="1828800" cy="2743200"/>
+          </a:xfrm>
+          <a:prstGeom prst="rect">
+            <a:avLst/>
+          </a:prstGeom>
+          <a:noFill/>
+        </p:spPr>
+        <p:txBody>
+          <a:bodyPr wrap="square">
+            <a:spAutoFit/>
+          </a:bodyPr>
+          <a:lstStyle/>
+          <a:p>
+            <a:pPr>
+              <a:defRPr sz="1200" b="1">
+                <a:solidFill>
+                  <a:srgbClr val="1B1F2A"/>
+                </a:solidFill>
+                <a:latin typeface="Montserrat"/>
+              </a:defRPr>
+            </a:pPr>
+            <a:r>
+              <a:t>4. CORRIGE</a:t>
+            </a:r>
+          </a:p>
+          <a:p>
+            <a:pPr>
+              <a:spcBef>
+                <a:spcPts val="800"/>
+              </a:spcBef>
+              <a:defRPr sz="1100">
+                <a:solidFill>
+                  <a:srgbClr val="5A6473"/>
+                </a:solidFill>
+                <a:latin typeface="Montserrat"/>
+              </a:defRPr>
+            </a:pPr>
+            <a:r>
+              <a:t>Ajusta con rapidez y sin culpa.</a:t>
+            </a:r>
+          </a:p>
+        </p:txBody>
+      </p:sp>
+      <p:sp>
+        <p:nvSpPr>
+          <p:cNvPr id="15" name="Rounded Rectangle 14"/>
+          <p:cNvSpPr/>
+          <p:nvPr/>
+        </p:nvSpPr>
+        <p:spPr>
+          <a:xfrm>
+            <a:off x="9436608" y="2651760"/>
+            <a:ext cx="2011680" cy="3566160"/>
+          </a:xfrm>
+          <a:prstGeom prst="roundRect">
+            <a:avLst/>
+          </a:prstGeom>
+          <a:solidFill>
+            <a:srgbClr val="FFFFFF"/>
+          </a:solidFill>
+          <a:ln w="12700">
+            <a:solidFill>
+              <a:srgbClr val="E2E6EE"/>
+            </a:solidFill>
+          </a:ln>
+        </p:spPr>
+        <p:style>
+          <a:lnRef idx="1">
+            <a:schemeClr val="accent1"/>
+          </a:lnRef>
+          <a:fillRef idx="3">
+            <a:schemeClr val="accent1"/>
+          </a:fillRef>
+          <a:effectRef idx="2">
+            <a:schemeClr val="accent1"/>
+          </a:effectRef>
+          <a:fontRef idx="minor">
+            <a:schemeClr val="lt1"/>
+          </a:fontRef>
+        </p:style>
+        <p:txBody>
+          <a:bodyPr rtlCol="0" anchor="ctr"/>
+          <a:lstStyle/>
+          <a:p>
+            <a:pPr algn="ctr"/>
+          </a:p>
+        </p:txBody>
+      </p:sp>
+      <p:sp>
+        <p:nvSpPr>
+          <p:cNvPr id="16" name="TextBox 15"/>
+          <p:cNvSpPr txBox="1"/>
+          <p:nvPr/>
+        </p:nvSpPr>
+        <p:spPr>
+          <a:xfrm>
+            <a:off x="9528048" y="3017520"/>
+            <a:ext cx="1828800" cy="2743200"/>
+          </a:xfrm>
+          <a:prstGeom prst="rect">
+            <a:avLst/>
+          </a:prstGeom>
+          <a:noFill/>
+        </p:spPr>
+        <p:txBody>
+          <a:bodyPr wrap="square">
+            <a:spAutoFit/>
+          </a:bodyPr>
+          <a:lstStyle/>
+          <a:p>
+            <a:pPr>
+              <a:defRPr sz="1200" b="1">
+                <a:solidFill>
+                  <a:srgbClr val="1B1F2A"/>
+                </a:solidFill>
+                <a:latin typeface="Montserrat"/>
+              </a:defRPr>
+            </a:pPr>
+            <a:r>
+              <a:t>5. REACCIONA</a:t>
+            </a:r>
+          </a:p>
+          <a:p>
+            <a:pPr>
+              <a:spcBef>
+                <a:spcPts val="800"/>
+              </a:spcBef>
+              <a:defRPr sz="1100">
+                <a:solidFill>
+                  <a:srgbClr val="5A6473"/>
+                </a:solidFill>
+                <a:latin typeface="Montserrat"/>
+              </a:defRPr>
+            </a:pPr>
+            <a:r>
+              <a:t>Vuelve a ejecutar con foco.</a:t>
             </a:r>
           </a:p>
         </p:txBody>
